--- a/assets/结构图/目标策略指标-001/example.pptx
+++ b/assets/结构图/目标策略指标-001/example.pptx
@@ -2,13 +2,13 @@
 <file path=ppt/presentation.xml><?xml version="1.0" encoding="utf-8"?>
 <p:presentation xmlns:p="http://schemas.openxmlformats.org/presentationml/2006/main">
   <p:sldMasterIdLst>
-    <p:sldMasterId xmlns:r="http://schemas.openxmlformats.org/officeDocument/2006/relationships" id="2147483648" r:id="Radfaa6be56324483"/>
+    <p:sldMasterId xmlns:r="http://schemas.openxmlformats.org/officeDocument/2006/relationships" id="2147483648" r:id="R98f6780d5a354b2f"/>
   </p:sldMasterIdLst>
   <p:notesMasterIdLst>
-    <p:notesMasterId xmlns:r="http://schemas.openxmlformats.org/officeDocument/2006/relationships" r:id="Reb32e32125a947d6"/>
+    <p:notesMasterId xmlns:r="http://schemas.openxmlformats.org/officeDocument/2006/relationships" r:id="R25e319920fef4607"/>
   </p:notesMasterIdLst>
   <p:sldIdLst>
-    <p:sldId xmlns:r="http://schemas.openxmlformats.org/officeDocument/2006/relationships" id="256" r:id="Re3922d1228c34a1b"/>
+    <p:sldId xmlns:r="http://schemas.openxmlformats.org/officeDocument/2006/relationships" id="256" r:id="R5960d4f7791c40fb"/>
   </p:sldIdLst>
   <p:sldSz cx="12192000" cy="6858000"/>
   <p:notesSz cx="6858000" cy="9144000"/>
@@ -524,7 +524,7 @@
   </p:cSld>
   <p:clrMap bg1="lt1" tx1="dk1" bg2="lt2" tx2="dk2" accent1="accent1" accent2="accent2" accent3="accent3" accent4="accent4" accent5="accent5" accent6="accent6" hlink="hlink" folHlink="folHlink"/>
   <p:sldLayoutIdLst>
-    <p:sldLayoutId xmlns:r="http://schemas.openxmlformats.org/officeDocument/2006/relationships" id="2147483649" r:id="R28e5f605d2ac4d7f"/>
+    <p:sldLayoutId xmlns:r="http://schemas.openxmlformats.org/officeDocument/2006/relationships" id="2147483649" r:id="R905cb5c8ca124664"/>
   </p:sldLayoutIdLst>
   <p:txStyles>
     <p:titleStyle>
@@ -1093,7 +1093,7 @@
           <p:cNvPr id="43" name="alignment-field-underlay">
             <a:extLst xmlns:a="http://schemas.openxmlformats.org/drawingml/2006/main">
               <a:ext uri="{FF2B5EF4-FFF2-40B4-BE49-F238E27FC236}">
-                <a16:creationId xmlns:a16="http://schemas.microsoft.com/office/drawing/2014/main" id="{87BD8BF2-8DAD-4A95-845F-21AF9D1CD4EE}"/>
+                <a16:creationId xmlns:a16="http://schemas.microsoft.com/office/drawing/2014/main" id="{5C87AB8C-DAF1-4A56-A294-EA52C28FE442}"/>
               </a:ext>
             </a:extLst>
           </p:cNvPr>
@@ -1126,7 +1126,7 @@
           <p:cNvPr id="2" name="alignment-field">
             <a:extLst xmlns:a="http://schemas.openxmlformats.org/drawingml/2006/main">
               <a:ext uri="{FF2B5EF4-FFF2-40B4-BE49-F238E27FC236}">
-                <a16:creationId xmlns:a16="http://schemas.microsoft.com/office/drawing/2014/main" id="{2840110C-AE47-4DCA-B13E-69C6D0531316}"/>
+                <a16:creationId xmlns:a16="http://schemas.microsoft.com/office/drawing/2014/main" id="{ACD3CEB5-3754-47B7-B11A-F5D9BE50AD97}"/>
               </a:ext>
             </a:extLst>
           </p:cNvPr>
@@ -1167,19 +1167,19 @@
           <p:cNvPr id="3" name="goal-title">
             <a:extLst xmlns:a="http://schemas.openxmlformats.org/drawingml/2006/main">
               <a:ext uri="{FF2B5EF4-FFF2-40B4-BE49-F238E27FC236}">
-                <a16:creationId xmlns:a16="http://schemas.microsoft.com/office/drawing/2014/main" id="{79D90D2F-91DA-4477-878E-06E4DC068626}"/>
-              </a:ext>
-            </a:extLst>
-          </p:cNvPr>
-          <p:cNvSpPr>
-            <a:spLocks xmlns:a="http://schemas.openxmlformats.org/drawingml/2006/main" noGrp="1"/>
-          </p:cNvSpPr>
-          <p:nvPr/>
-        </p:nvSpPr>
-        <p:spPr>
-          <a:xfrm xmlns:a="http://schemas.openxmlformats.org/drawingml/2006/main" rot="0">
-            <a:off x="2286000" y="1724025"/>
-            <a:ext cx="7620000" cy="285750"/>
+                <a16:creationId xmlns:a16="http://schemas.microsoft.com/office/drawing/2014/main" id="{16715135-7346-496A-92F1-AE3EA4BC0BA8}"/>
+              </a:ext>
+            </a:extLst>
+          </p:cNvPr>
+          <p:cNvSpPr>
+            <a:spLocks xmlns:a="http://schemas.openxmlformats.org/drawingml/2006/main" noGrp="1"/>
+          </p:cNvSpPr>
+          <p:nvPr/>
+        </p:nvSpPr>
+        <p:spPr>
+          <a:xfrm xmlns:a="http://schemas.openxmlformats.org/drawingml/2006/main" rot="0">
+            <a:off x="2286000" y="1715691"/>
+            <a:ext cx="7620000" cy="298694"/>
           </a:xfrm>
           <a:prstGeom xmlns:a="http://schemas.openxmlformats.org/drawingml/2006/main" prst="rect">
             <a:avLst/>
@@ -1191,14 +1191,14 @@
           </a:ln>
         </p:spPr>
         <p:txBody>
-          <a:bodyPr xmlns:a="http://schemas.openxmlformats.org/drawingml/2006/main" wrap="none" lIns="0" tIns="0" rIns="0" bIns="0" anchor="ctr">
+          <a:bodyPr xmlns:a="http://schemas.openxmlformats.org/drawingml/2006/main" wrap="square" lIns="0" tIns="0" rIns="0" bIns="0" anchor="ctr">
             <a:noAutofit/>
           </a:bodyPr>
           <a:lstStyle xmlns:a="http://schemas.openxmlformats.org/drawingml/2006/main"/>
           <a:p xmlns:a="http://schemas.openxmlformats.org/drawingml/2006/main">
             <a:pPr algn="ctr">
               <a:lnSpc>
-                <a:spcPct val="107100"/>
+                <a:spcPct val="112000"/>
               </a:lnSpc>
               <a:buNone/>
               <a:defRPr sz="2100" b="1" i="0">
@@ -1229,19 +1229,19 @@
           <p:cNvPr id="4" name="goal-body">
             <a:extLst xmlns:a="http://schemas.openxmlformats.org/drawingml/2006/main">
               <a:ext uri="{FF2B5EF4-FFF2-40B4-BE49-F238E27FC236}">
-                <a16:creationId xmlns:a16="http://schemas.microsoft.com/office/drawing/2014/main" id="{138236BF-FE7F-404B-93CB-51795F993A73}"/>
-              </a:ext>
-            </a:extLst>
-          </p:cNvPr>
-          <p:cNvSpPr>
-            <a:spLocks xmlns:a="http://schemas.openxmlformats.org/drawingml/2006/main" noGrp="1"/>
-          </p:cNvSpPr>
-          <p:nvPr/>
-        </p:nvSpPr>
-        <p:spPr>
-          <a:xfrm xmlns:a="http://schemas.openxmlformats.org/drawingml/2006/main" rot="0">
-            <a:off x="2286000" y="2076450"/>
-            <a:ext cx="7620000" cy="209550"/>
+                <a16:creationId xmlns:a16="http://schemas.microsoft.com/office/drawing/2014/main" id="{5E4504E8-1D9A-4E30-9D49-F05CB20C55E2}"/>
+              </a:ext>
+            </a:extLst>
+          </p:cNvPr>
+          <p:cNvSpPr>
+            <a:spLocks xmlns:a="http://schemas.openxmlformats.org/drawingml/2006/main" noGrp="1"/>
+          </p:cNvSpPr>
+          <p:nvPr/>
+        </p:nvSpPr>
+        <p:spPr>
+          <a:xfrm xmlns:a="http://schemas.openxmlformats.org/drawingml/2006/main" rot="0">
+            <a:off x="2286000" y="2062010"/>
+            <a:ext cx="7620000" cy="241849"/>
           </a:xfrm>
           <a:prstGeom xmlns:a="http://schemas.openxmlformats.org/drawingml/2006/main" prst="rect">
             <a:avLst/>
@@ -1253,17 +1253,17 @@
           </a:ln>
         </p:spPr>
         <p:txBody>
-          <a:bodyPr xmlns:a="http://schemas.openxmlformats.org/drawingml/2006/main" wrap="none" lIns="0" tIns="0" rIns="0" bIns="0" anchor="ctr">
+          <a:bodyPr xmlns:a="http://schemas.openxmlformats.org/drawingml/2006/main" wrap="square" lIns="0" tIns="0" rIns="0" bIns="0" anchor="ctr">
             <a:noAutofit/>
           </a:bodyPr>
           <a:lstStyle xmlns:a="http://schemas.openxmlformats.org/drawingml/2006/main"/>
           <a:p xmlns:a="http://schemas.openxmlformats.org/drawingml/2006/main">
             <a:pPr algn="ctr">
               <a:lnSpc>
-                <a:spcPct val="110000"/>
+                <a:spcPct val="112000"/>
               </a:lnSpc>
               <a:buNone/>
-              <a:defRPr sz="1500" b="0" i="0">
+              <a:defRPr sz="1700" b="0" i="0">
                 <a:solidFill>
                   <a:srgbClr val="60758D"/>
                 </a:solidFill>
@@ -1273,7 +1273,7 @@
               </a:defRPr>
             </a:pPr>
             <a:r>
-              <a:rPr sz="1500" b="0" i="0">
+              <a:rPr sz="1700" b="0" i="0">
                 <a:solidFill>
                   <a:srgbClr val="60758D"/>
                 </a:solidFill>
@@ -1291,7 +1291,7 @@
           <p:cNvPr id="5" name="alignment-accent">
             <a:extLst xmlns:a="http://schemas.openxmlformats.org/drawingml/2006/main">
               <a:ext uri="{FF2B5EF4-FFF2-40B4-BE49-F238E27FC236}">
-                <a16:creationId xmlns:a16="http://schemas.microsoft.com/office/drawing/2014/main" id="{77483F6A-8DF7-4BBB-AA82-47C049C5C877}"/>
+                <a16:creationId xmlns:a16="http://schemas.microsoft.com/office/drawing/2014/main" id="{EC4CD132-B19D-4980-B290-29E8BEBA32F0}"/>
               </a:ext>
             </a:extLst>
           </p:cNvPr>
@@ -1335,7 +1335,7 @@
           <p:cNvPr id="6" name="metric-band-underlay">
             <a:extLst xmlns:a="http://schemas.openxmlformats.org/drawingml/2006/main">
               <a:ext uri="{FF2B5EF4-FFF2-40B4-BE49-F238E27FC236}">
-                <a16:creationId xmlns:a16="http://schemas.microsoft.com/office/drawing/2014/main" id="{0E00589C-2397-4C13-AD58-AC5E90CD888E}"/>
+                <a16:creationId xmlns:a16="http://schemas.microsoft.com/office/drawing/2014/main" id="{AB0DCB68-4A78-41B3-A0F5-5898020473F5}"/>
               </a:ext>
             </a:extLst>
           </p:cNvPr>
@@ -1368,7 +1368,7 @@
           <p:cNvPr id="7" name="strategy-1-order-disc">
             <a:extLst xmlns:a="http://schemas.openxmlformats.org/drawingml/2006/main">
               <a:ext uri="{FF2B5EF4-FFF2-40B4-BE49-F238E27FC236}">
-                <a16:creationId xmlns:a16="http://schemas.microsoft.com/office/drawing/2014/main" id="{240A29A1-3B6E-48CE-A450-6D0D7B527CEA}"/>
+                <a16:creationId xmlns:a16="http://schemas.microsoft.com/office/drawing/2014/main" id="{55437F10-2CED-4670-9FEF-CFC5F3DCCA10}"/>
               </a:ext>
             </a:extLst>
           </p:cNvPr>
@@ -1401,7 +1401,7 @@
           <p:cNvPr id="8" name="strategy-1-order-core">
             <a:extLst xmlns:a="http://schemas.openxmlformats.org/drawingml/2006/main">
               <a:ext uri="{FF2B5EF4-FFF2-40B4-BE49-F238E27FC236}">
-                <a16:creationId xmlns:a16="http://schemas.microsoft.com/office/drawing/2014/main" id="{EC23630A-414A-46F0-A815-9258655698FA}"/>
+                <a16:creationId xmlns:a16="http://schemas.microsoft.com/office/drawing/2014/main" id="{B77559F7-3325-48E6-9EE8-6D2026527C53}"/>
               </a:ext>
             </a:extLst>
           </p:cNvPr>
@@ -1438,7 +1438,7 @@
           <p:cNvPr id="9" name="strategy-1-order">
             <a:extLst xmlns:a="http://schemas.openxmlformats.org/drawingml/2006/main">
               <a:ext uri="{FF2B5EF4-FFF2-40B4-BE49-F238E27FC236}">
-                <a16:creationId xmlns:a16="http://schemas.microsoft.com/office/drawing/2014/main" id="{42DDC343-74E4-484F-B176-B6C158BF7069}"/>
+                <a16:creationId xmlns:a16="http://schemas.microsoft.com/office/drawing/2014/main" id="{91CA3603-89ED-4B5A-A656-42B1969D2971}"/>
               </a:ext>
             </a:extLst>
           </p:cNvPr>
@@ -1500,19 +1500,19 @@
           <p:cNvPr id="10" name="strategy-1-title">
             <a:extLst xmlns:a="http://schemas.openxmlformats.org/drawingml/2006/main">
               <a:ext uri="{FF2B5EF4-FFF2-40B4-BE49-F238E27FC236}">
-                <a16:creationId xmlns:a16="http://schemas.microsoft.com/office/drawing/2014/main" id="{AF6672A8-A0FA-42BF-BE3C-D0017F25AE80}"/>
-              </a:ext>
-            </a:extLst>
-          </p:cNvPr>
-          <p:cNvSpPr>
-            <a:spLocks xmlns:a="http://schemas.openxmlformats.org/drawingml/2006/main" noGrp="1"/>
-          </p:cNvSpPr>
-          <p:nvPr/>
-        </p:nvSpPr>
-        <p:spPr>
-          <a:xfrm xmlns:a="http://schemas.openxmlformats.org/drawingml/2006/main" rot="0">
-            <a:off x="1638300" y="3324225"/>
-            <a:ext cx="2692298" cy="285750"/>
+                <a16:creationId xmlns:a16="http://schemas.microsoft.com/office/drawing/2014/main" id="{0E1BA1E0-D9D0-4F68-8173-6157F9E94B52}"/>
+              </a:ext>
+            </a:extLst>
+          </p:cNvPr>
+          <p:cNvSpPr>
+            <a:spLocks xmlns:a="http://schemas.openxmlformats.org/drawingml/2006/main" noGrp="1"/>
+          </p:cNvSpPr>
+          <p:nvPr/>
+        </p:nvSpPr>
+        <p:spPr>
+          <a:xfrm xmlns:a="http://schemas.openxmlformats.org/drawingml/2006/main" rot="0">
+            <a:off x="1771650" y="3384204"/>
+            <a:ext cx="2425598" cy="306591"/>
           </a:xfrm>
           <a:prstGeom xmlns:a="http://schemas.openxmlformats.org/drawingml/2006/main" prst="rect">
             <a:avLst/>
@@ -1524,17 +1524,17 @@
           </a:ln>
         </p:spPr>
         <p:txBody>
-          <a:bodyPr xmlns:a="http://schemas.openxmlformats.org/drawingml/2006/main" wrap="none" lIns="0" tIns="0" rIns="0" bIns="0" anchor="ctr">
+          <a:bodyPr xmlns:a="http://schemas.openxmlformats.org/drawingml/2006/main" wrap="square" lIns="0" tIns="0" rIns="0" bIns="0" anchor="ctr">
             <a:noAutofit/>
           </a:bodyPr>
           <a:lstStyle xmlns:a="http://schemas.openxmlformats.org/drawingml/2006/main"/>
           <a:p xmlns:a="http://schemas.openxmlformats.org/drawingml/2006/main">
             <a:pPr algn="ctr">
               <a:lnSpc>
-                <a:spcPct val="118400"/>
+                <a:spcPct val="115000"/>
               </a:lnSpc>
               <a:buNone/>
-              <a:defRPr sz="1900" b="1" i="0">
+              <a:defRPr sz="2100" b="1" i="0">
                 <a:solidFill>
                   <a:srgbClr val="254B7C"/>
                 </a:solidFill>
@@ -1544,7 +1544,7 @@
               </a:defRPr>
             </a:pPr>
             <a:r>
-              <a:rPr sz="1900" b="1" i="0">
+              <a:rPr sz="2100" b="1" i="0">
                 <a:solidFill>
                   <a:srgbClr val="254B7C"/>
                 </a:solidFill>
@@ -1562,19 +1562,19 @@
           <p:cNvPr id="11" name="strategy-1-body">
             <a:extLst xmlns:a="http://schemas.openxmlformats.org/drawingml/2006/main">
               <a:ext uri="{FF2B5EF4-FFF2-40B4-BE49-F238E27FC236}">
-                <a16:creationId xmlns:a16="http://schemas.microsoft.com/office/drawing/2014/main" id="{2D1A6835-E8CE-45F7-A009-C3255016621D}"/>
-              </a:ext>
-            </a:extLst>
-          </p:cNvPr>
-          <p:cNvSpPr>
-            <a:spLocks xmlns:a="http://schemas.openxmlformats.org/drawingml/2006/main" noGrp="1"/>
-          </p:cNvSpPr>
-          <p:nvPr/>
-        </p:nvSpPr>
-        <p:spPr>
-          <a:xfrm xmlns:a="http://schemas.openxmlformats.org/drawingml/2006/main" rot="0">
-            <a:off x="1771650" y="3752850"/>
-            <a:ext cx="2425598" cy="1000125"/>
+                <a16:creationId xmlns:a16="http://schemas.microsoft.com/office/drawing/2014/main" id="{BA0096F5-DD47-4520-8FAF-A002E9D44248}"/>
+              </a:ext>
+            </a:extLst>
+          </p:cNvPr>
+          <p:cNvSpPr>
+            <a:spLocks xmlns:a="http://schemas.openxmlformats.org/drawingml/2006/main" noGrp="1"/>
+          </p:cNvSpPr>
+          <p:nvPr/>
+        </p:nvSpPr>
+        <p:spPr>
+          <a:xfrm xmlns:a="http://schemas.openxmlformats.org/drawingml/2006/main" rot="0">
+            <a:off x="1771650" y="3786035"/>
+            <a:ext cx="2425598" cy="906809"/>
           </a:xfrm>
           <a:prstGeom xmlns:a="http://schemas.openxmlformats.org/drawingml/2006/main" prst="rect">
             <a:avLst/>
@@ -1614,7 +1614,61 @@
                 <a:ea typeface="Microsoft YaHei"/>
                 <a:cs typeface="Microsoft YaHei"/>
               </a:rPr>
-              <a:t>把原稿拆成稳定字段，保留真实逻辑并控制每页信息密度。</a:t>
+              <a:t>把原稿拆成稳定字段，保</a:t>
+            </a:r>
+          </a:p>
+          <a:p xmlns:a="http://schemas.openxmlformats.org/drawingml/2006/main">
+            <a:pPr algn="ctr">
+              <a:lnSpc>
+                <a:spcPct val="140000"/>
+              </a:lnSpc>
+              <a:buNone/>
+              <a:defRPr sz="1700" b="0" i="0">
+                <a:solidFill>
+                  <a:srgbClr val="4C5F75"/>
+                </a:solidFill>
+                <a:latin typeface="Microsoft YaHei"/>
+                <a:ea typeface="Microsoft YaHei"/>
+                <a:cs typeface="Microsoft YaHei"/>
+              </a:defRPr>
+            </a:pPr>
+            <a:r>
+              <a:rPr sz="1700" b="0" i="0">
+                <a:solidFill>
+                  <a:srgbClr val="4C5F75"/>
+                </a:solidFill>
+                <a:latin typeface="Microsoft YaHei"/>
+                <a:ea typeface="Microsoft YaHei"/>
+                <a:cs typeface="Microsoft YaHei"/>
+              </a:rPr>
+              <a:t>留真实逻辑并控制每页信</a:t>
+            </a:r>
+          </a:p>
+          <a:p xmlns:a="http://schemas.openxmlformats.org/drawingml/2006/main">
+            <a:pPr algn="ctr">
+              <a:lnSpc>
+                <a:spcPct val="140000"/>
+              </a:lnSpc>
+              <a:buNone/>
+              <a:defRPr sz="1700" b="0" i="0">
+                <a:solidFill>
+                  <a:srgbClr val="4C5F75"/>
+                </a:solidFill>
+                <a:latin typeface="Microsoft YaHei"/>
+                <a:ea typeface="Microsoft YaHei"/>
+                <a:cs typeface="Microsoft YaHei"/>
+              </a:defRPr>
+            </a:pPr>
+            <a:r>
+              <a:rPr sz="1700" b="0" i="0">
+                <a:solidFill>
+                  <a:srgbClr val="4C5F75"/>
+                </a:solidFill>
+                <a:latin typeface="Microsoft YaHei"/>
+                <a:ea typeface="Microsoft YaHei"/>
+                <a:cs typeface="Microsoft YaHei"/>
+              </a:rPr>
+              <a:t>息密度。</a:t>
             </a:r>
           </a:p>
         </p:txBody>
@@ -1624,7 +1678,7 @@
           <p:cNvPr id="12" name="strategy-2-divider">
             <a:extLst xmlns:a="http://schemas.openxmlformats.org/drawingml/2006/main">
               <a:ext uri="{FF2B5EF4-FFF2-40B4-BE49-F238E27FC236}">
-                <a16:creationId xmlns:a16="http://schemas.microsoft.com/office/drawing/2014/main" id="{822F87D5-951A-4D0F-8497-EB3A73D47278}"/>
+                <a16:creationId xmlns:a16="http://schemas.microsoft.com/office/drawing/2014/main" id="{88E3F8F4-35B2-414D-903B-0740FEC6A4D5}"/>
               </a:ext>
             </a:extLst>
           </p:cNvPr>
@@ -1655,7 +1709,7 @@
           <p:cNvPr id="13" name="strategy-2-order-disc">
             <a:extLst xmlns:a="http://schemas.openxmlformats.org/drawingml/2006/main">
               <a:ext uri="{FF2B5EF4-FFF2-40B4-BE49-F238E27FC236}">
-                <a16:creationId xmlns:a16="http://schemas.microsoft.com/office/drawing/2014/main" id="{62F02AFA-ED02-4E40-9759-74AA0799FFA1}"/>
+                <a16:creationId xmlns:a16="http://schemas.microsoft.com/office/drawing/2014/main" id="{F21195CB-2E4A-41E0-A5DA-6D0405A7B4AA}"/>
               </a:ext>
             </a:extLst>
           </p:cNvPr>
@@ -1688,7 +1742,7 @@
           <p:cNvPr id="14" name="strategy-2-order-core">
             <a:extLst xmlns:a="http://schemas.openxmlformats.org/drawingml/2006/main">
               <a:ext uri="{FF2B5EF4-FFF2-40B4-BE49-F238E27FC236}">
-                <a16:creationId xmlns:a16="http://schemas.microsoft.com/office/drawing/2014/main" id="{66C90225-DF36-4FE0-A4A1-B4F69B6C69AF}"/>
+                <a16:creationId xmlns:a16="http://schemas.microsoft.com/office/drawing/2014/main" id="{E101A306-D1A8-40F6-8D67-8A4D68CDEA1C}"/>
               </a:ext>
             </a:extLst>
           </p:cNvPr>
@@ -1725,7 +1779,7 @@
           <p:cNvPr id="15" name="strategy-2-order">
             <a:extLst xmlns:a="http://schemas.openxmlformats.org/drawingml/2006/main">
               <a:ext uri="{FF2B5EF4-FFF2-40B4-BE49-F238E27FC236}">
-                <a16:creationId xmlns:a16="http://schemas.microsoft.com/office/drawing/2014/main" id="{CF60B726-6D48-468C-B6DF-ADA644215835}"/>
+                <a16:creationId xmlns:a16="http://schemas.microsoft.com/office/drawing/2014/main" id="{D1046B78-2D71-478F-95D7-EBB4D1060233}"/>
               </a:ext>
             </a:extLst>
           </p:cNvPr>
@@ -1787,19 +1841,19 @@
           <p:cNvPr id="16" name="strategy-2-title">
             <a:extLst xmlns:a="http://schemas.openxmlformats.org/drawingml/2006/main">
               <a:ext uri="{FF2B5EF4-FFF2-40B4-BE49-F238E27FC236}">
-                <a16:creationId xmlns:a16="http://schemas.microsoft.com/office/drawing/2014/main" id="{4CDBA891-DE52-4CE2-B336-2FCF42C26215}"/>
-              </a:ext>
-            </a:extLst>
-          </p:cNvPr>
-          <p:cNvSpPr>
-            <a:spLocks xmlns:a="http://schemas.openxmlformats.org/drawingml/2006/main" noGrp="1"/>
-          </p:cNvSpPr>
-          <p:nvPr/>
-        </p:nvSpPr>
-        <p:spPr>
-          <a:xfrm xmlns:a="http://schemas.openxmlformats.org/drawingml/2006/main" rot="0">
-            <a:off x="4749698" y="3324225"/>
-            <a:ext cx="2692451" cy="285750"/>
+                <a16:creationId xmlns:a16="http://schemas.microsoft.com/office/drawing/2014/main" id="{7487A251-7EB0-4E73-92EB-6604FDACB547}"/>
+              </a:ext>
+            </a:extLst>
+          </p:cNvPr>
+          <p:cNvSpPr>
+            <a:spLocks xmlns:a="http://schemas.openxmlformats.org/drawingml/2006/main" noGrp="1"/>
+          </p:cNvSpPr>
+          <p:nvPr/>
+        </p:nvSpPr>
+        <p:spPr>
+          <a:xfrm xmlns:a="http://schemas.openxmlformats.org/drawingml/2006/main" rot="0">
+            <a:off x="4883048" y="3384204"/>
+            <a:ext cx="2425751" cy="306591"/>
           </a:xfrm>
           <a:prstGeom xmlns:a="http://schemas.openxmlformats.org/drawingml/2006/main" prst="rect">
             <a:avLst/>
@@ -1811,17 +1865,17 @@
           </a:ln>
         </p:spPr>
         <p:txBody>
-          <a:bodyPr xmlns:a="http://schemas.openxmlformats.org/drawingml/2006/main" wrap="none" lIns="0" tIns="0" rIns="0" bIns="0" anchor="ctr">
+          <a:bodyPr xmlns:a="http://schemas.openxmlformats.org/drawingml/2006/main" wrap="square" lIns="0" tIns="0" rIns="0" bIns="0" anchor="ctr">
             <a:noAutofit/>
           </a:bodyPr>
           <a:lstStyle xmlns:a="http://schemas.openxmlformats.org/drawingml/2006/main"/>
           <a:p xmlns:a="http://schemas.openxmlformats.org/drawingml/2006/main">
             <a:pPr algn="ctr">
               <a:lnSpc>
-                <a:spcPct val="118400"/>
+                <a:spcPct val="115000"/>
               </a:lnSpc>
               <a:buNone/>
-              <a:defRPr sz="1900" b="1" i="0">
+              <a:defRPr sz="2100" b="1" i="0">
                 <a:solidFill>
                   <a:srgbClr val="254B7C"/>
                 </a:solidFill>
@@ -1831,7 +1885,7 @@
               </a:defRPr>
             </a:pPr>
             <a:r>
-              <a:rPr sz="1900" b="1" i="0">
+              <a:rPr sz="2100" b="1" i="0">
                 <a:solidFill>
                   <a:srgbClr val="254B7C"/>
                 </a:solidFill>
@@ -1849,19 +1903,19 @@
           <p:cNvPr id="17" name="strategy-2-body">
             <a:extLst xmlns:a="http://schemas.openxmlformats.org/drawingml/2006/main">
               <a:ext uri="{FF2B5EF4-FFF2-40B4-BE49-F238E27FC236}">
-                <a16:creationId xmlns:a16="http://schemas.microsoft.com/office/drawing/2014/main" id="{047F8022-F62E-4791-92F3-D5DA92FF42F8}"/>
-              </a:ext>
-            </a:extLst>
-          </p:cNvPr>
-          <p:cNvSpPr>
-            <a:spLocks xmlns:a="http://schemas.openxmlformats.org/drawingml/2006/main" noGrp="1"/>
-          </p:cNvSpPr>
-          <p:nvPr/>
-        </p:nvSpPr>
-        <p:spPr>
-          <a:xfrm xmlns:a="http://schemas.openxmlformats.org/drawingml/2006/main" rot="0">
-            <a:off x="4883048" y="3752850"/>
-            <a:ext cx="2425751" cy="1000125"/>
+                <a16:creationId xmlns:a16="http://schemas.microsoft.com/office/drawing/2014/main" id="{05878A9F-1E70-4DA7-B1FD-EB0778490D5B}"/>
+              </a:ext>
+            </a:extLst>
+          </p:cNvPr>
+          <p:cNvSpPr>
+            <a:spLocks xmlns:a="http://schemas.openxmlformats.org/drawingml/2006/main" noGrp="1"/>
+          </p:cNvSpPr>
+          <p:nvPr/>
+        </p:nvSpPr>
+        <p:spPr>
+          <a:xfrm xmlns:a="http://schemas.openxmlformats.org/drawingml/2006/main" rot="0">
+            <a:off x="4883048" y="3786035"/>
+            <a:ext cx="2425751" cy="906809"/>
           </a:xfrm>
           <a:prstGeom xmlns:a="http://schemas.openxmlformats.org/drawingml/2006/main" prst="rect">
             <a:avLst/>
@@ -1901,7 +1955,61 @@
                 <a:ea typeface="Microsoft YaHei"/>
                 <a:cs typeface="Microsoft YaHei"/>
               </a:rPr>
-              <a:t>把常用逻辑固化为组件，统一字号、版心与连接语法。</a:t>
+              <a:t>把常用逻辑固化为组件，</a:t>
+            </a:r>
+          </a:p>
+          <a:p xmlns:a="http://schemas.openxmlformats.org/drawingml/2006/main">
+            <a:pPr algn="ctr">
+              <a:lnSpc>
+                <a:spcPct val="140000"/>
+              </a:lnSpc>
+              <a:buNone/>
+              <a:defRPr sz="1700" b="0" i="0">
+                <a:solidFill>
+                  <a:srgbClr val="4C5F75"/>
+                </a:solidFill>
+                <a:latin typeface="Microsoft YaHei"/>
+                <a:ea typeface="Microsoft YaHei"/>
+                <a:cs typeface="Microsoft YaHei"/>
+              </a:defRPr>
+            </a:pPr>
+            <a:r>
+              <a:rPr sz="1700" b="0" i="0">
+                <a:solidFill>
+                  <a:srgbClr val="4C5F75"/>
+                </a:solidFill>
+                <a:latin typeface="Microsoft YaHei"/>
+                <a:ea typeface="Microsoft YaHei"/>
+                <a:cs typeface="Microsoft YaHei"/>
+              </a:rPr>
+              <a:t>统一字号、版心与连接语</a:t>
+            </a:r>
+          </a:p>
+          <a:p xmlns:a="http://schemas.openxmlformats.org/drawingml/2006/main">
+            <a:pPr algn="ctr">
+              <a:lnSpc>
+                <a:spcPct val="140000"/>
+              </a:lnSpc>
+              <a:buNone/>
+              <a:defRPr sz="1700" b="0" i="0">
+                <a:solidFill>
+                  <a:srgbClr val="4C5F75"/>
+                </a:solidFill>
+                <a:latin typeface="Microsoft YaHei"/>
+                <a:ea typeface="Microsoft YaHei"/>
+                <a:cs typeface="Microsoft YaHei"/>
+              </a:defRPr>
+            </a:pPr>
+            <a:r>
+              <a:rPr sz="1700" b="0" i="0">
+                <a:solidFill>
+                  <a:srgbClr val="4C5F75"/>
+                </a:solidFill>
+                <a:latin typeface="Microsoft YaHei"/>
+                <a:ea typeface="Microsoft YaHei"/>
+                <a:cs typeface="Microsoft YaHei"/>
+              </a:rPr>
+              <a:t>法。</a:t>
             </a:r>
           </a:p>
         </p:txBody>
@@ -1911,7 +2019,7 @@
           <p:cNvPr id="18" name="strategy-3-divider">
             <a:extLst xmlns:a="http://schemas.openxmlformats.org/drawingml/2006/main">
               <a:ext uri="{FF2B5EF4-FFF2-40B4-BE49-F238E27FC236}">
-                <a16:creationId xmlns:a16="http://schemas.microsoft.com/office/drawing/2014/main" id="{6B2D5578-0D40-4703-B64B-FF4B9A9F140B}"/>
+                <a16:creationId xmlns:a16="http://schemas.microsoft.com/office/drawing/2014/main" id="{6C47D638-F11A-4E26-BBC7-517A27C8C62C}"/>
               </a:ext>
             </a:extLst>
           </p:cNvPr>
@@ -1942,7 +2050,7 @@
           <p:cNvPr id="19" name="strategy-3-order-disc">
             <a:extLst xmlns:a="http://schemas.openxmlformats.org/drawingml/2006/main">
               <a:ext uri="{FF2B5EF4-FFF2-40B4-BE49-F238E27FC236}">
-                <a16:creationId xmlns:a16="http://schemas.microsoft.com/office/drawing/2014/main" id="{DD7643B4-D2A9-47C7-81A4-CE9CA366017F}"/>
+                <a16:creationId xmlns:a16="http://schemas.microsoft.com/office/drawing/2014/main" id="{C1D782CB-E6EB-4D89-A648-3B7E4B2A0363}"/>
               </a:ext>
             </a:extLst>
           </p:cNvPr>
@@ -1975,7 +2083,7 @@
           <p:cNvPr id="20" name="strategy-3-order-core">
             <a:extLst xmlns:a="http://schemas.openxmlformats.org/drawingml/2006/main">
               <a:ext uri="{FF2B5EF4-FFF2-40B4-BE49-F238E27FC236}">
-                <a16:creationId xmlns:a16="http://schemas.microsoft.com/office/drawing/2014/main" id="{2EEA5F5A-B374-49C1-95C4-0694FA732AB9}"/>
+                <a16:creationId xmlns:a16="http://schemas.microsoft.com/office/drawing/2014/main" id="{9217EF40-81E9-448B-A1E5-D220FA60F5B3}"/>
               </a:ext>
             </a:extLst>
           </p:cNvPr>
@@ -2012,7 +2120,7 @@
           <p:cNvPr id="21" name="strategy-3-order">
             <a:extLst xmlns:a="http://schemas.openxmlformats.org/drawingml/2006/main">
               <a:ext uri="{FF2B5EF4-FFF2-40B4-BE49-F238E27FC236}">
-                <a16:creationId xmlns:a16="http://schemas.microsoft.com/office/drawing/2014/main" id="{8EA335A6-717D-4D93-BADA-690D394B8A4B}"/>
+                <a16:creationId xmlns:a16="http://schemas.microsoft.com/office/drawing/2014/main" id="{E6AA2E14-2A98-4A9A-BCB6-DA59D7339B83}"/>
               </a:ext>
             </a:extLst>
           </p:cNvPr>
@@ -2074,19 +2182,19 @@
           <p:cNvPr id="22" name="strategy-3-title">
             <a:extLst xmlns:a="http://schemas.openxmlformats.org/drawingml/2006/main">
               <a:ext uri="{FF2B5EF4-FFF2-40B4-BE49-F238E27FC236}">
-                <a16:creationId xmlns:a16="http://schemas.microsoft.com/office/drawing/2014/main" id="{E9011CC9-8A22-4CCC-8D51-E09EE9D79A89}"/>
-              </a:ext>
-            </a:extLst>
-          </p:cNvPr>
-          <p:cNvSpPr>
-            <a:spLocks xmlns:a="http://schemas.openxmlformats.org/drawingml/2006/main" noGrp="1"/>
-          </p:cNvSpPr>
-          <p:nvPr/>
-        </p:nvSpPr>
-        <p:spPr>
-          <a:xfrm xmlns:a="http://schemas.openxmlformats.org/drawingml/2006/main" rot="0">
-            <a:off x="7861249" y="3324225"/>
-            <a:ext cx="2692298" cy="285750"/>
+                <a16:creationId xmlns:a16="http://schemas.microsoft.com/office/drawing/2014/main" id="{5EFBFC26-A2FB-400D-970F-7E88F64CCAB1}"/>
+              </a:ext>
+            </a:extLst>
+          </p:cNvPr>
+          <p:cNvSpPr>
+            <a:spLocks xmlns:a="http://schemas.openxmlformats.org/drawingml/2006/main" noGrp="1"/>
+          </p:cNvSpPr>
+          <p:nvPr/>
+        </p:nvSpPr>
+        <p:spPr>
+          <a:xfrm xmlns:a="http://schemas.openxmlformats.org/drawingml/2006/main" rot="0">
+            <a:off x="7994599" y="3384204"/>
+            <a:ext cx="2425598" cy="306591"/>
           </a:xfrm>
           <a:prstGeom xmlns:a="http://schemas.openxmlformats.org/drawingml/2006/main" prst="rect">
             <a:avLst/>
@@ -2098,17 +2206,17 @@
           </a:ln>
         </p:spPr>
         <p:txBody>
-          <a:bodyPr xmlns:a="http://schemas.openxmlformats.org/drawingml/2006/main" wrap="none" lIns="0" tIns="0" rIns="0" bIns="0" anchor="ctr">
+          <a:bodyPr xmlns:a="http://schemas.openxmlformats.org/drawingml/2006/main" wrap="square" lIns="0" tIns="0" rIns="0" bIns="0" anchor="ctr">
             <a:noAutofit/>
           </a:bodyPr>
           <a:lstStyle xmlns:a="http://schemas.openxmlformats.org/drawingml/2006/main"/>
           <a:p xmlns:a="http://schemas.openxmlformats.org/drawingml/2006/main">
             <a:pPr algn="ctr">
               <a:lnSpc>
-                <a:spcPct val="118400"/>
+                <a:spcPct val="115000"/>
               </a:lnSpc>
               <a:buNone/>
-              <a:defRPr sz="1900" b="1" i="0">
+              <a:defRPr sz="2100" b="1" i="0">
                 <a:solidFill>
                   <a:srgbClr val="254B7C"/>
                 </a:solidFill>
@@ -2118,7 +2226,7 @@
               </a:defRPr>
             </a:pPr>
             <a:r>
-              <a:rPr sz="1900" b="1" i="0">
+              <a:rPr sz="2100" b="1" i="0">
                 <a:solidFill>
                   <a:srgbClr val="254B7C"/>
                 </a:solidFill>
@@ -2136,19 +2244,19 @@
           <p:cNvPr id="23" name="strategy-3-body">
             <a:extLst xmlns:a="http://schemas.openxmlformats.org/drawingml/2006/main">
               <a:ext uri="{FF2B5EF4-FFF2-40B4-BE49-F238E27FC236}">
-                <a16:creationId xmlns:a16="http://schemas.microsoft.com/office/drawing/2014/main" id="{D3344F7A-A165-459F-8F8F-6E5DF1DD34B0}"/>
-              </a:ext>
-            </a:extLst>
-          </p:cNvPr>
-          <p:cNvSpPr>
-            <a:spLocks xmlns:a="http://schemas.openxmlformats.org/drawingml/2006/main" noGrp="1"/>
-          </p:cNvSpPr>
-          <p:nvPr/>
-        </p:nvSpPr>
-        <p:spPr>
-          <a:xfrm xmlns:a="http://schemas.openxmlformats.org/drawingml/2006/main" rot="0">
-            <a:off x="7994599" y="3752850"/>
-            <a:ext cx="2425598" cy="1000125"/>
+                <a16:creationId xmlns:a16="http://schemas.microsoft.com/office/drawing/2014/main" id="{9AEAEA64-88E9-4F66-88DC-EF78378E220A}"/>
+              </a:ext>
+            </a:extLst>
+          </p:cNvPr>
+          <p:cNvSpPr>
+            <a:spLocks xmlns:a="http://schemas.openxmlformats.org/drawingml/2006/main" noGrp="1"/>
+          </p:cNvSpPr>
+          <p:nvPr/>
+        </p:nvSpPr>
+        <p:spPr>
+          <a:xfrm xmlns:a="http://schemas.openxmlformats.org/drawingml/2006/main" rot="0">
+            <a:off x="7994599" y="3786035"/>
+            <a:ext cx="2425598" cy="906809"/>
           </a:xfrm>
           <a:prstGeom xmlns:a="http://schemas.openxmlformats.org/drawingml/2006/main" prst="rect">
             <a:avLst/>
@@ -2188,7 +2296,61 @@
                 <a:ea typeface="Microsoft YaHei"/>
                 <a:cs typeface="Microsoft YaHei"/>
               </a:rPr>
-              <a:t>确定性排版交付，保证结果稳定、可编辑、可重复。</a:t>
+              <a:t>确定性排版交付，保证结</a:t>
+            </a:r>
+          </a:p>
+          <a:p xmlns:a="http://schemas.openxmlformats.org/drawingml/2006/main">
+            <a:pPr algn="ctr">
+              <a:lnSpc>
+                <a:spcPct val="140000"/>
+              </a:lnSpc>
+              <a:buNone/>
+              <a:defRPr sz="1700" b="0" i="0">
+                <a:solidFill>
+                  <a:srgbClr val="4C5F75"/>
+                </a:solidFill>
+                <a:latin typeface="Microsoft YaHei"/>
+                <a:ea typeface="Microsoft YaHei"/>
+                <a:cs typeface="Microsoft YaHei"/>
+              </a:defRPr>
+            </a:pPr>
+            <a:r>
+              <a:rPr sz="1700" b="0" i="0">
+                <a:solidFill>
+                  <a:srgbClr val="4C5F75"/>
+                </a:solidFill>
+                <a:latin typeface="Microsoft YaHei"/>
+                <a:ea typeface="Microsoft YaHei"/>
+                <a:cs typeface="Microsoft YaHei"/>
+              </a:rPr>
+              <a:t>果稳定、可编辑、可重</a:t>
+            </a:r>
+          </a:p>
+          <a:p xmlns:a="http://schemas.openxmlformats.org/drawingml/2006/main">
+            <a:pPr algn="ctr">
+              <a:lnSpc>
+                <a:spcPct val="140000"/>
+              </a:lnSpc>
+              <a:buNone/>
+              <a:defRPr sz="1700" b="0" i="0">
+                <a:solidFill>
+                  <a:srgbClr val="4C5F75"/>
+                </a:solidFill>
+                <a:latin typeface="Microsoft YaHei"/>
+                <a:ea typeface="Microsoft YaHei"/>
+                <a:cs typeface="Microsoft YaHei"/>
+              </a:defRPr>
+            </a:pPr>
+            <a:r>
+              <a:rPr sz="1700" b="0" i="0">
+                <a:solidFill>
+                  <a:srgbClr val="4C5F75"/>
+                </a:solidFill>
+                <a:latin typeface="Microsoft YaHei"/>
+                <a:ea typeface="Microsoft YaHei"/>
+                <a:cs typeface="Microsoft YaHei"/>
+              </a:rPr>
+              <a:t>复。</a:t>
             </a:r>
           </a:p>
         </p:txBody>
@@ -2198,7 +2360,7 @@
           <p:cNvPr id="24" name="metric-band">
             <a:extLst xmlns:a="http://schemas.openxmlformats.org/drawingml/2006/main">
               <a:ext uri="{FF2B5EF4-FFF2-40B4-BE49-F238E27FC236}">
-                <a16:creationId xmlns:a16="http://schemas.microsoft.com/office/drawing/2014/main" id="{AAB82A42-35FC-4D0B-A941-42F2DC142A61}"/>
+                <a16:creationId xmlns:a16="http://schemas.microsoft.com/office/drawing/2014/main" id="{610E4252-3AA6-4CB6-9577-31F4F5D136CD}"/>
               </a:ext>
             </a:extLst>
           </p:cNvPr>
@@ -2233,7 +2395,7 @@
           <p:cNvPr id="25" name="metric-band-accent">
             <a:extLst xmlns:a="http://schemas.openxmlformats.org/drawingml/2006/main">
               <a:ext uri="{FF2B5EF4-FFF2-40B4-BE49-F238E27FC236}">
-                <a16:creationId xmlns:a16="http://schemas.microsoft.com/office/drawing/2014/main" id="{1EE47D42-D06B-4E98-82E9-2753380E1BF1}"/>
+                <a16:creationId xmlns:a16="http://schemas.microsoft.com/office/drawing/2014/main" id="{B14DDAF8-9863-4597-952A-FB18CCE8DB50}"/>
               </a:ext>
             </a:extLst>
           </p:cNvPr>
@@ -2274,19 +2436,19 @@
           <p:cNvPr id="26" name="strategy-1-metric-1-value">
             <a:extLst xmlns:a="http://schemas.openxmlformats.org/drawingml/2006/main">
               <a:ext uri="{FF2B5EF4-FFF2-40B4-BE49-F238E27FC236}">
-                <a16:creationId xmlns:a16="http://schemas.microsoft.com/office/drawing/2014/main" id="{24BD8BD2-8666-4D22-B040-921C7227972A}"/>
-              </a:ext>
-            </a:extLst>
-          </p:cNvPr>
-          <p:cNvSpPr>
-            <a:spLocks xmlns:a="http://schemas.openxmlformats.org/drawingml/2006/main" noGrp="1"/>
-          </p:cNvSpPr>
-          <p:nvPr/>
-        </p:nvSpPr>
-        <p:spPr>
-          <a:xfrm xmlns:a="http://schemas.openxmlformats.org/drawingml/2006/main" rot="0">
-            <a:off x="1762125" y="5057775"/>
-            <a:ext cx="1250899" cy="276225"/>
+                <a16:creationId xmlns:a16="http://schemas.microsoft.com/office/drawing/2014/main" id="{A5510A30-26B9-4678-A369-CA43D6359677}"/>
+              </a:ext>
+            </a:extLst>
+          </p:cNvPr>
+          <p:cNvSpPr>
+            <a:spLocks xmlns:a="http://schemas.openxmlformats.org/drawingml/2006/main" noGrp="1"/>
+          </p:cNvSpPr>
+          <p:nvPr/>
+        </p:nvSpPr>
+        <p:spPr>
+          <a:xfrm xmlns:a="http://schemas.openxmlformats.org/drawingml/2006/main" rot="0">
+            <a:off x="1762125" y="5090522"/>
+            <a:ext cx="1250899" cy="277416"/>
           </a:xfrm>
           <a:prstGeom xmlns:a="http://schemas.openxmlformats.org/drawingml/2006/main" prst="rect">
             <a:avLst/>
@@ -2305,7 +2467,7 @@
           <a:p xmlns:a="http://schemas.openxmlformats.org/drawingml/2006/main">
             <a:pPr algn="ctr">
               <a:lnSpc>
-                <a:spcPct val="114500"/>
+                <a:spcPct val="115000"/>
               </a:lnSpc>
               <a:buNone/>
               <a:defRPr sz="1900" b="1" i="0">
@@ -2336,19 +2498,19 @@
           <p:cNvPr id="27" name="strategy-1-metric-1-label">
             <a:extLst xmlns:a="http://schemas.openxmlformats.org/drawingml/2006/main">
               <a:ext uri="{FF2B5EF4-FFF2-40B4-BE49-F238E27FC236}">
-                <a16:creationId xmlns:a16="http://schemas.microsoft.com/office/drawing/2014/main" id="{2C3A116F-E3C7-4188-907A-E25C728BC06D}"/>
-              </a:ext>
-            </a:extLst>
-          </p:cNvPr>
-          <p:cNvSpPr>
-            <a:spLocks xmlns:a="http://schemas.openxmlformats.org/drawingml/2006/main" noGrp="1"/>
-          </p:cNvSpPr>
-          <p:nvPr/>
-        </p:nvSpPr>
-        <p:spPr>
-          <a:xfrm xmlns:a="http://schemas.openxmlformats.org/drawingml/2006/main" rot="0">
-            <a:off x="1762125" y="5419725"/>
-            <a:ext cx="1250899" cy="209550"/>
+                <a16:creationId xmlns:a16="http://schemas.microsoft.com/office/drawing/2014/main" id="{FEA89560-C6EA-46F0-B693-04352614ACE3}"/>
+              </a:ext>
+            </a:extLst>
+          </p:cNvPr>
+          <p:cNvSpPr>
+            <a:spLocks xmlns:a="http://schemas.openxmlformats.org/drawingml/2006/main" noGrp="1"/>
+          </p:cNvSpPr>
+          <p:nvPr/>
+        </p:nvSpPr>
+        <p:spPr>
+          <a:xfrm xmlns:a="http://schemas.openxmlformats.org/drawingml/2006/main" rot="0">
+            <a:off x="1762125" y="5415563"/>
+            <a:ext cx="1250899" cy="228600"/>
           </a:xfrm>
           <a:prstGeom xmlns:a="http://schemas.openxmlformats.org/drawingml/2006/main" prst="rect">
             <a:avLst/>
@@ -2367,7 +2529,7 @@
           <a:p xmlns:a="http://schemas.openxmlformats.org/drawingml/2006/main">
             <a:pPr algn="ctr">
               <a:lnSpc>
-                <a:spcPct val="110000"/>
+                <a:spcPct val="120000"/>
               </a:lnSpc>
               <a:buNone/>
               <a:defRPr sz="1500" b="0" i="0">
@@ -2398,7 +2560,7 @@
           <p:cNvPr id="28" name="strategy-1-metric-divider">
             <a:extLst xmlns:a="http://schemas.openxmlformats.org/drawingml/2006/main">
               <a:ext uri="{FF2B5EF4-FFF2-40B4-BE49-F238E27FC236}">
-                <a16:creationId xmlns:a16="http://schemas.microsoft.com/office/drawing/2014/main" id="{2B126422-7C03-4CAC-A9D6-FD9EE09A03AA}"/>
+                <a16:creationId xmlns:a16="http://schemas.microsoft.com/office/drawing/2014/main" id="{CBE6AE99-005E-4FBF-B320-BC0DA2E5D07F}"/>
               </a:ext>
             </a:extLst>
           </p:cNvPr>
@@ -2429,19 +2591,19 @@
           <p:cNvPr id="29" name="strategy-1-metric-2-value">
             <a:extLst xmlns:a="http://schemas.openxmlformats.org/drawingml/2006/main">
               <a:ext uri="{FF2B5EF4-FFF2-40B4-BE49-F238E27FC236}">
-                <a16:creationId xmlns:a16="http://schemas.microsoft.com/office/drawing/2014/main" id="{4D56A023-73F5-4015-A8C8-AF38307B72AA}"/>
-              </a:ext>
-            </a:extLst>
-          </p:cNvPr>
-          <p:cNvSpPr>
-            <a:spLocks xmlns:a="http://schemas.openxmlformats.org/drawingml/2006/main" noGrp="1"/>
-          </p:cNvSpPr>
-          <p:nvPr/>
-        </p:nvSpPr>
-        <p:spPr>
-          <a:xfrm xmlns:a="http://schemas.openxmlformats.org/drawingml/2006/main" rot="0">
-            <a:off x="3184474" y="5057775"/>
-            <a:ext cx="1250899" cy="276225"/>
+                <a16:creationId xmlns:a16="http://schemas.microsoft.com/office/drawing/2014/main" id="{5AD1A5B0-25C0-4EA9-99A1-6840A8B99EAC}"/>
+              </a:ext>
+            </a:extLst>
+          </p:cNvPr>
+          <p:cNvSpPr>
+            <a:spLocks xmlns:a="http://schemas.openxmlformats.org/drawingml/2006/main" noGrp="1"/>
+          </p:cNvSpPr>
+          <p:nvPr/>
+        </p:nvSpPr>
+        <p:spPr>
+          <a:xfrm xmlns:a="http://schemas.openxmlformats.org/drawingml/2006/main" rot="0">
+            <a:off x="3184474" y="5090522"/>
+            <a:ext cx="1250899" cy="277416"/>
           </a:xfrm>
           <a:prstGeom xmlns:a="http://schemas.openxmlformats.org/drawingml/2006/main" prst="rect">
             <a:avLst/>
@@ -2460,7 +2622,7 @@
           <a:p xmlns:a="http://schemas.openxmlformats.org/drawingml/2006/main">
             <a:pPr algn="ctr">
               <a:lnSpc>
-                <a:spcPct val="114500"/>
+                <a:spcPct val="115000"/>
               </a:lnSpc>
               <a:buNone/>
               <a:defRPr sz="1900" b="1" i="0">
@@ -2491,19 +2653,19 @@
           <p:cNvPr id="30" name="strategy-1-metric-2-label">
             <a:extLst xmlns:a="http://schemas.openxmlformats.org/drawingml/2006/main">
               <a:ext uri="{FF2B5EF4-FFF2-40B4-BE49-F238E27FC236}">
-                <a16:creationId xmlns:a16="http://schemas.microsoft.com/office/drawing/2014/main" id="{7FD0D5C3-A4A6-454F-B85E-AEB57C727C55}"/>
-              </a:ext>
-            </a:extLst>
-          </p:cNvPr>
-          <p:cNvSpPr>
-            <a:spLocks xmlns:a="http://schemas.openxmlformats.org/drawingml/2006/main" noGrp="1"/>
-          </p:cNvSpPr>
-          <p:nvPr/>
-        </p:nvSpPr>
-        <p:spPr>
-          <a:xfrm xmlns:a="http://schemas.openxmlformats.org/drawingml/2006/main" rot="0">
-            <a:off x="3184474" y="5419725"/>
-            <a:ext cx="1250899" cy="209550"/>
+                <a16:creationId xmlns:a16="http://schemas.microsoft.com/office/drawing/2014/main" id="{1D692EB5-2A3C-42BA-AD23-FDCC71CDADE8}"/>
+              </a:ext>
+            </a:extLst>
+          </p:cNvPr>
+          <p:cNvSpPr>
+            <a:spLocks xmlns:a="http://schemas.openxmlformats.org/drawingml/2006/main" noGrp="1"/>
+          </p:cNvSpPr>
+          <p:nvPr/>
+        </p:nvSpPr>
+        <p:spPr>
+          <a:xfrm xmlns:a="http://schemas.openxmlformats.org/drawingml/2006/main" rot="0">
+            <a:off x="3184474" y="5415563"/>
+            <a:ext cx="1250899" cy="228600"/>
           </a:xfrm>
           <a:prstGeom xmlns:a="http://schemas.openxmlformats.org/drawingml/2006/main" prst="rect">
             <a:avLst/>
@@ -2522,7 +2684,7 @@
           <a:p xmlns:a="http://schemas.openxmlformats.org/drawingml/2006/main">
             <a:pPr algn="ctr">
               <a:lnSpc>
-                <a:spcPct val="110000"/>
+                <a:spcPct val="120000"/>
               </a:lnSpc>
               <a:buNone/>
               <a:defRPr sz="1500" b="0" i="0">
@@ -2553,7 +2715,7 @@
           <p:cNvPr id="31" name="strategy-2-foundation-divider">
             <a:extLst xmlns:a="http://schemas.openxmlformats.org/drawingml/2006/main">
               <a:ext uri="{FF2B5EF4-FFF2-40B4-BE49-F238E27FC236}">
-                <a16:creationId xmlns:a16="http://schemas.microsoft.com/office/drawing/2014/main" id="{49E89A75-B402-4221-95E0-C129C01E114E}"/>
+                <a16:creationId xmlns:a16="http://schemas.microsoft.com/office/drawing/2014/main" id="{7AFDEA46-8EA8-4E5E-A9D4-5D0D4F98FE0A}"/>
               </a:ext>
             </a:extLst>
           </p:cNvPr>
@@ -2584,19 +2746,19 @@
           <p:cNvPr id="32" name="strategy-2-metric-1-value">
             <a:extLst xmlns:a="http://schemas.openxmlformats.org/drawingml/2006/main">
               <a:ext uri="{FF2B5EF4-FFF2-40B4-BE49-F238E27FC236}">
-                <a16:creationId xmlns:a16="http://schemas.microsoft.com/office/drawing/2014/main" id="{A1F277C4-05C0-43E6-9D5A-72A32D7C460E}"/>
-              </a:ext>
-            </a:extLst>
-          </p:cNvPr>
-          <p:cNvSpPr>
-            <a:spLocks xmlns:a="http://schemas.openxmlformats.org/drawingml/2006/main" noGrp="1"/>
-          </p:cNvSpPr>
-          <p:nvPr/>
-        </p:nvSpPr>
-        <p:spPr>
-          <a:xfrm xmlns:a="http://schemas.openxmlformats.org/drawingml/2006/main" rot="0">
-            <a:off x="4759223" y="5057775"/>
-            <a:ext cx="1250899" cy="276225"/>
+                <a16:creationId xmlns:a16="http://schemas.microsoft.com/office/drawing/2014/main" id="{E07D97A8-9A4D-4D0A-8004-D390946AF196}"/>
+              </a:ext>
+            </a:extLst>
+          </p:cNvPr>
+          <p:cNvSpPr>
+            <a:spLocks xmlns:a="http://schemas.openxmlformats.org/drawingml/2006/main" noGrp="1"/>
+          </p:cNvSpPr>
+          <p:nvPr/>
+        </p:nvSpPr>
+        <p:spPr>
+          <a:xfrm xmlns:a="http://schemas.openxmlformats.org/drawingml/2006/main" rot="0">
+            <a:off x="4759223" y="5090522"/>
+            <a:ext cx="1250899" cy="277416"/>
           </a:xfrm>
           <a:prstGeom xmlns:a="http://schemas.openxmlformats.org/drawingml/2006/main" prst="rect">
             <a:avLst/>
@@ -2615,7 +2777,7 @@
           <a:p xmlns:a="http://schemas.openxmlformats.org/drawingml/2006/main">
             <a:pPr algn="ctr">
               <a:lnSpc>
-                <a:spcPct val="114500"/>
+                <a:spcPct val="115000"/>
               </a:lnSpc>
               <a:buNone/>
               <a:defRPr sz="1900" b="1" i="0">
@@ -2646,19 +2808,19 @@
           <p:cNvPr id="33" name="strategy-2-metric-1-label">
             <a:extLst xmlns:a="http://schemas.openxmlformats.org/drawingml/2006/main">
               <a:ext uri="{FF2B5EF4-FFF2-40B4-BE49-F238E27FC236}">
-                <a16:creationId xmlns:a16="http://schemas.microsoft.com/office/drawing/2014/main" id="{BD236BC2-BC5E-4DE0-93E5-7AF40251ECA5}"/>
-              </a:ext>
-            </a:extLst>
-          </p:cNvPr>
-          <p:cNvSpPr>
-            <a:spLocks xmlns:a="http://schemas.openxmlformats.org/drawingml/2006/main" noGrp="1"/>
-          </p:cNvSpPr>
-          <p:nvPr/>
-        </p:nvSpPr>
-        <p:spPr>
-          <a:xfrm xmlns:a="http://schemas.openxmlformats.org/drawingml/2006/main" rot="0">
-            <a:off x="4759223" y="5419725"/>
-            <a:ext cx="1250899" cy="209550"/>
+                <a16:creationId xmlns:a16="http://schemas.microsoft.com/office/drawing/2014/main" id="{F1C9E4C1-47AD-45C7-A3D9-112461E70400}"/>
+              </a:ext>
+            </a:extLst>
+          </p:cNvPr>
+          <p:cNvSpPr>
+            <a:spLocks xmlns:a="http://schemas.openxmlformats.org/drawingml/2006/main" noGrp="1"/>
+          </p:cNvSpPr>
+          <p:nvPr/>
+        </p:nvSpPr>
+        <p:spPr>
+          <a:xfrm xmlns:a="http://schemas.openxmlformats.org/drawingml/2006/main" rot="0">
+            <a:off x="4759223" y="5415563"/>
+            <a:ext cx="1250899" cy="228600"/>
           </a:xfrm>
           <a:prstGeom xmlns:a="http://schemas.openxmlformats.org/drawingml/2006/main" prst="rect">
             <a:avLst/>
@@ -2677,7 +2839,7 @@
           <a:p xmlns:a="http://schemas.openxmlformats.org/drawingml/2006/main">
             <a:pPr algn="ctr">
               <a:lnSpc>
-                <a:spcPct val="110000"/>
+                <a:spcPct val="120000"/>
               </a:lnSpc>
               <a:buNone/>
               <a:defRPr sz="1500" b="0" i="0">
@@ -2708,7 +2870,7 @@
           <p:cNvPr id="34" name="strategy-2-metric-divider">
             <a:extLst xmlns:a="http://schemas.openxmlformats.org/drawingml/2006/main">
               <a:ext uri="{FF2B5EF4-FFF2-40B4-BE49-F238E27FC236}">
-                <a16:creationId xmlns:a16="http://schemas.microsoft.com/office/drawing/2014/main" id="{7D5C06C9-EC69-4F52-A857-DC86F1C9745E}"/>
+                <a16:creationId xmlns:a16="http://schemas.microsoft.com/office/drawing/2014/main" id="{27781A24-F466-40A0-BAA4-A1083506FB6B}"/>
               </a:ext>
             </a:extLst>
           </p:cNvPr>
@@ -2739,19 +2901,19 @@
           <p:cNvPr id="35" name="strategy-2-metric-2-value">
             <a:extLst xmlns:a="http://schemas.openxmlformats.org/drawingml/2006/main">
               <a:ext uri="{FF2B5EF4-FFF2-40B4-BE49-F238E27FC236}">
-                <a16:creationId xmlns:a16="http://schemas.microsoft.com/office/drawing/2014/main" id="{A4D3D5C9-448C-4E4B-9A49-50040F5D9707}"/>
-              </a:ext>
-            </a:extLst>
-          </p:cNvPr>
-          <p:cNvSpPr>
-            <a:spLocks xmlns:a="http://schemas.openxmlformats.org/drawingml/2006/main" noGrp="1"/>
-          </p:cNvSpPr>
-          <p:nvPr/>
-        </p:nvSpPr>
-        <p:spPr>
-          <a:xfrm xmlns:a="http://schemas.openxmlformats.org/drawingml/2006/main" rot="0">
-            <a:off x="6181573" y="5057775"/>
-            <a:ext cx="1251052" cy="276225"/>
+                <a16:creationId xmlns:a16="http://schemas.microsoft.com/office/drawing/2014/main" id="{544618B0-531E-4D1D-8FD1-BA13F60BED5E}"/>
+              </a:ext>
+            </a:extLst>
+          </p:cNvPr>
+          <p:cNvSpPr>
+            <a:spLocks xmlns:a="http://schemas.openxmlformats.org/drawingml/2006/main" noGrp="1"/>
+          </p:cNvSpPr>
+          <p:nvPr/>
+        </p:nvSpPr>
+        <p:spPr>
+          <a:xfrm xmlns:a="http://schemas.openxmlformats.org/drawingml/2006/main" rot="0">
+            <a:off x="6181573" y="5090522"/>
+            <a:ext cx="1251052" cy="277416"/>
           </a:xfrm>
           <a:prstGeom xmlns:a="http://schemas.openxmlformats.org/drawingml/2006/main" prst="rect">
             <a:avLst/>
@@ -2770,7 +2932,7 @@
           <a:p xmlns:a="http://schemas.openxmlformats.org/drawingml/2006/main">
             <a:pPr algn="ctr">
               <a:lnSpc>
-                <a:spcPct val="114500"/>
+                <a:spcPct val="115000"/>
               </a:lnSpc>
               <a:buNone/>
               <a:defRPr sz="1900" b="1" i="0">
@@ -2801,19 +2963,19 @@
           <p:cNvPr id="36" name="strategy-2-metric-2-label">
             <a:extLst xmlns:a="http://schemas.openxmlformats.org/drawingml/2006/main">
               <a:ext uri="{FF2B5EF4-FFF2-40B4-BE49-F238E27FC236}">
-                <a16:creationId xmlns:a16="http://schemas.microsoft.com/office/drawing/2014/main" id="{5AFA6620-6A82-440A-A908-533706E88DD3}"/>
-              </a:ext>
-            </a:extLst>
-          </p:cNvPr>
-          <p:cNvSpPr>
-            <a:spLocks xmlns:a="http://schemas.openxmlformats.org/drawingml/2006/main" noGrp="1"/>
-          </p:cNvSpPr>
-          <p:nvPr/>
-        </p:nvSpPr>
-        <p:spPr>
-          <a:xfrm xmlns:a="http://schemas.openxmlformats.org/drawingml/2006/main" rot="0">
-            <a:off x="6181573" y="5419725"/>
-            <a:ext cx="1251052" cy="209550"/>
+                <a16:creationId xmlns:a16="http://schemas.microsoft.com/office/drawing/2014/main" id="{65AF8247-67CF-43D6-95E6-3498B0297B66}"/>
+              </a:ext>
+            </a:extLst>
+          </p:cNvPr>
+          <p:cNvSpPr>
+            <a:spLocks xmlns:a="http://schemas.openxmlformats.org/drawingml/2006/main" noGrp="1"/>
+          </p:cNvSpPr>
+          <p:nvPr/>
+        </p:nvSpPr>
+        <p:spPr>
+          <a:xfrm xmlns:a="http://schemas.openxmlformats.org/drawingml/2006/main" rot="0">
+            <a:off x="6181573" y="5415563"/>
+            <a:ext cx="1251052" cy="228600"/>
           </a:xfrm>
           <a:prstGeom xmlns:a="http://schemas.openxmlformats.org/drawingml/2006/main" prst="rect">
             <a:avLst/>
@@ -2832,7 +2994,7 @@
           <a:p xmlns:a="http://schemas.openxmlformats.org/drawingml/2006/main">
             <a:pPr algn="ctr">
               <a:lnSpc>
-                <a:spcPct val="110000"/>
+                <a:spcPct val="120000"/>
               </a:lnSpc>
               <a:buNone/>
               <a:defRPr sz="1500" b="0" i="0">
@@ -2863,7 +3025,7 @@
           <p:cNvPr id="37" name="strategy-3-foundation-divider">
             <a:extLst xmlns:a="http://schemas.openxmlformats.org/drawingml/2006/main">
               <a:ext uri="{FF2B5EF4-FFF2-40B4-BE49-F238E27FC236}">
-                <a16:creationId xmlns:a16="http://schemas.microsoft.com/office/drawing/2014/main" id="{CF2F9722-7A1C-4A9E-93A9-C57F5461C7C9}"/>
+                <a16:creationId xmlns:a16="http://schemas.microsoft.com/office/drawing/2014/main" id="{7B69D39C-A654-4D40-98C7-44FBF77616C6}"/>
               </a:ext>
             </a:extLst>
           </p:cNvPr>
@@ -2894,19 +3056,19 @@
           <p:cNvPr id="38" name="strategy-3-metric-1-value">
             <a:extLst xmlns:a="http://schemas.openxmlformats.org/drawingml/2006/main">
               <a:ext uri="{FF2B5EF4-FFF2-40B4-BE49-F238E27FC236}">
-                <a16:creationId xmlns:a16="http://schemas.microsoft.com/office/drawing/2014/main" id="{59178EAB-B2D5-4501-8D0C-114C45330EB4}"/>
-              </a:ext>
-            </a:extLst>
-          </p:cNvPr>
-          <p:cNvSpPr>
-            <a:spLocks xmlns:a="http://schemas.openxmlformats.org/drawingml/2006/main" noGrp="1"/>
-          </p:cNvSpPr>
-          <p:nvPr/>
-        </p:nvSpPr>
-        <p:spPr>
-          <a:xfrm xmlns:a="http://schemas.openxmlformats.org/drawingml/2006/main" rot="0">
-            <a:off x="7756474" y="5057775"/>
-            <a:ext cx="1250899" cy="276225"/>
+                <a16:creationId xmlns:a16="http://schemas.microsoft.com/office/drawing/2014/main" id="{2AB794AF-A44F-49ED-B3D6-82689041A56A}"/>
+              </a:ext>
+            </a:extLst>
+          </p:cNvPr>
+          <p:cNvSpPr>
+            <a:spLocks xmlns:a="http://schemas.openxmlformats.org/drawingml/2006/main" noGrp="1"/>
+          </p:cNvSpPr>
+          <p:nvPr/>
+        </p:nvSpPr>
+        <p:spPr>
+          <a:xfrm xmlns:a="http://schemas.openxmlformats.org/drawingml/2006/main" rot="0">
+            <a:off x="7756474" y="5090522"/>
+            <a:ext cx="1250899" cy="277416"/>
           </a:xfrm>
           <a:prstGeom xmlns:a="http://schemas.openxmlformats.org/drawingml/2006/main" prst="rect">
             <a:avLst/>
@@ -2925,7 +3087,7 @@
           <a:p xmlns:a="http://schemas.openxmlformats.org/drawingml/2006/main">
             <a:pPr algn="ctr">
               <a:lnSpc>
-                <a:spcPct val="114500"/>
+                <a:spcPct val="115000"/>
               </a:lnSpc>
               <a:buNone/>
               <a:defRPr sz="1900" b="1" i="0">
@@ -2956,19 +3118,19 @@
           <p:cNvPr id="39" name="strategy-3-metric-1-label">
             <a:extLst xmlns:a="http://schemas.openxmlformats.org/drawingml/2006/main">
               <a:ext uri="{FF2B5EF4-FFF2-40B4-BE49-F238E27FC236}">
-                <a16:creationId xmlns:a16="http://schemas.microsoft.com/office/drawing/2014/main" id="{90750D0A-9555-452D-99BF-9E2C1B85C713}"/>
-              </a:ext>
-            </a:extLst>
-          </p:cNvPr>
-          <p:cNvSpPr>
-            <a:spLocks xmlns:a="http://schemas.openxmlformats.org/drawingml/2006/main" noGrp="1"/>
-          </p:cNvSpPr>
-          <p:nvPr/>
-        </p:nvSpPr>
-        <p:spPr>
-          <a:xfrm xmlns:a="http://schemas.openxmlformats.org/drawingml/2006/main" rot="0">
-            <a:off x="7756474" y="5419725"/>
-            <a:ext cx="1250899" cy="209550"/>
+                <a16:creationId xmlns:a16="http://schemas.microsoft.com/office/drawing/2014/main" id="{7784C923-D94D-48D0-97C5-4B7BF5379208}"/>
+              </a:ext>
+            </a:extLst>
+          </p:cNvPr>
+          <p:cNvSpPr>
+            <a:spLocks xmlns:a="http://schemas.openxmlformats.org/drawingml/2006/main" noGrp="1"/>
+          </p:cNvSpPr>
+          <p:nvPr/>
+        </p:nvSpPr>
+        <p:spPr>
+          <a:xfrm xmlns:a="http://schemas.openxmlformats.org/drawingml/2006/main" rot="0">
+            <a:off x="7756474" y="5415563"/>
+            <a:ext cx="1250899" cy="228600"/>
           </a:xfrm>
           <a:prstGeom xmlns:a="http://schemas.openxmlformats.org/drawingml/2006/main" prst="rect">
             <a:avLst/>
@@ -2987,7 +3149,7 @@
           <a:p xmlns:a="http://schemas.openxmlformats.org/drawingml/2006/main">
             <a:pPr algn="ctr">
               <a:lnSpc>
-                <a:spcPct val="110000"/>
+                <a:spcPct val="120000"/>
               </a:lnSpc>
               <a:buNone/>
               <a:defRPr sz="1500" b="0" i="0">
@@ -3018,7 +3180,7 @@
           <p:cNvPr id="40" name="strategy-3-metric-divider">
             <a:extLst xmlns:a="http://schemas.openxmlformats.org/drawingml/2006/main">
               <a:ext uri="{FF2B5EF4-FFF2-40B4-BE49-F238E27FC236}">
-                <a16:creationId xmlns:a16="http://schemas.microsoft.com/office/drawing/2014/main" id="{672BD4FE-E87E-498C-9BC8-7F5DB7932C84}"/>
+                <a16:creationId xmlns:a16="http://schemas.microsoft.com/office/drawing/2014/main" id="{2DDD3681-0E1C-4C5E-8132-6C15922B58E1}"/>
               </a:ext>
             </a:extLst>
           </p:cNvPr>
@@ -3049,19 +3211,19 @@
           <p:cNvPr id="41" name="strategy-3-metric-2-value">
             <a:extLst xmlns:a="http://schemas.openxmlformats.org/drawingml/2006/main">
               <a:ext uri="{FF2B5EF4-FFF2-40B4-BE49-F238E27FC236}">
-                <a16:creationId xmlns:a16="http://schemas.microsoft.com/office/drawing/2014/main" id="{E18F7BFC-714B-428C-98BB-37323364CAD3}"/>
-              </a:ext>
-            </a:extLst>
-          </p:cNvPr>
-          <p:cNvSpPr>
-            <a:spLocks xmlns:a="http://schemas.openxmlformats.org/drawingml/2006/main" noGrp="1"/>
-          </p:cNvSpPr>
-          <p:nvPr/>
-        </p:nvSpPr>
-        <p:spPr>
-          <a:xfrm xmlns:a="http://schemas.openxmlformats.org/drawingml/2006/main" rot="0">
-            <a:off x="9178823" y="5057775"/>
-            <a:ext cx="1250899" cy="276225"/>
+                <a16:creationId xmlns:a16="http://schemas.microsoft.com/office/drawing/2014/main" id="{1B9FC367-BC31-457F-A1EE-8D7DBBB809AF}"/>
+              </a:ext>
+            </a:extLst>
+          </p:cNvPr>
+          <p:cNvSpPr>
+            <a:spLocks xmlns:a="http://schemas.openxmlformats.org/drawingml/2006/main" noGrp="1"/>
+          </p:cNvSpPr>
+          <p:nvPr/>
+        </p:nvSpPr>
+        <p:spPr>
+          <a:xfrm xmlns:a="http://schemas.openxmlformats.org/drawingml/2006/main" rot="0">
+            <a:off x="9178823" y="5090522"/>
+            <a:ext cx="1250899" cy="277416"/>
           </a:xfrm>
           <a:prstGeom xmlns:a="http://schemas.openxmlformats.org/drawingml/2006/main" prst="rect">
             <a:avLst/>
@@ -3080,7 +3242,7 @@
           <a:p xmlns:a="http://schemas.openxmlformats.org/drawingml/2006/main">
             <a:pPr algn="ctr">
               <a:lnSpc>
-                <a:spcPct val="114500"/>
+                <a:spcPct val="115000"/>
               </a:lnSpc>
               <a:buNone/>
               <a:defRPr sz="1900" b="1" i="0">
@@ -3111,19 +3273,19 @@
           <p:cNvPr id="42" name="strategy-3-metric-2-label">
             <a:extLst xmlns:a="http://schemas.openxmlformats.org/drawingml/2006/main">
               <a:ext uri="{FF2B5EF4-FFF2-40B4-BE49-F238E27FC236}">
-                <a16:creationId xmlns:a16="http://schemas.microsoft.com/office/drawing/2014/main" id="{C3E8D54C-529A-4457-8D4E-7E9E3F2E2A01}"/>
-              </a:ext>
-            </a:extLst>
-          </p:cNvPr>
-          <p:cNvSpPr>
-            <a:spLocks xmlns:a="http://schemas.openxmlformats.org/drawingml/2006/main" noGrp="1"/>
-          </p:cNvSpPr>
-          <p:nvPr/>
-        </p:nvSpPr>
-        <p:spPr>
-          <a:xfrm xmlns:a="http://schemas.openxmlformats.org/drawingml/2006/main" rot="0">
-            <a:off x="9178823" y="5419725"/>
-            <a:ext cx="1250899" cy="209550"/>
+                <a16:creationId xmlns:a16="http://schemas.microsoft.com/office/drawing/2014/main" id="{FC2B227A-F486-44D9-8619-8AE430DCA641}"/>
+              </a:ext>
+            </a:extLst>
+          </p:cNvPr>
+          <p:cNvSpPr>
+            <a:spLocks xmlns:a="http://schemas.openxmlformats.org/drawingml/2006/main" noGrp="1"/>
+          </p:cNvSpPr>
+          <p:nvPr/>
+        </p:nvSpPr>
+        <p:spPr>
+          <a:xfrm xmlns:a="http://schemas.openxmlformats.org/drawingml/2006/main" rot="0">
+            <a:off x="9178823" y="5415563"/>
+            <a:ext cx="1250899" cy="228600"/>
           </a:xfrm>
           <a:prstGeom xmlns:a="http://schemas.openxmlformats.org/drawingml/2006/main" prst="rect">
             <a:avLst/>
@@ -3142,7 +3304,7 @@
           <a:p xmlns:a="http://schemas.openxmlformats.org/drawingml/2006/main">
             <a:pPr algn="ctr">
               <a:lnSpc>
-                <a:spcPct val="110000"/>
+                <a:spcPct val="120000"/>
               </a:lnSpc>
               <a:buNone/>
               <a:defRPr sz="1500" b="0" i="0">
@@ -3171,7 +3333,7 @@
     </p:spTree>
     <p:extLst>
       <p:ext uri="{BB962C8B-B14F-4D97-AF65-F5344CB8AC3E}">
-        <p14:creationId xmlns:p14="http://schemas.microsoft.com/office/powerpoint/2010/main" val="1205647295"/>
+        <p14:creationId xmlns:p14="http://schemas.microsoft.com/office/powerpoint/2010/main" val="945003027"/>
       </p:ext>
     </p:extLst>
   </p:cSld>

--- a/assets/结构图/目标策略指标-001/example.pptx
+++ b/assets/结构图/目标策略指标-001/example.pptx
@@ -2,13 +2,13 @@
 <file path=ppt/presentation.xml><?xml version="1.0" encoding="utf-8"?>
 <p:presentation xmlns:p="http://schemas.openxmlformats.org/presentationml/2006/main">
   <p:sldMasterIdLst>
-    <p:sldMasterId xmlns:r="http://schemas.openxmlformats.org/officeDocument/2006/relationships" id="2147483648" r:id="R98f6780d5a354b2f"/>
+    <p:sldMasterId xmlns:r="http://schemas.openxmlformats.org/officeDocument/2006/relationships" id="2147483648" r:id="Ra35e933d5ad14b00"/>
   </p:sldMasterIdLst>
   <p:notesMasterIdLst>
-    <p:notesMasterId xmlns:r="http://schemas.openxmlformats.org/officeDocument/2006/relationships" r:id="R25e319920fef4607"/>
+    <p:notesMasterId xmlns:r="http://schemas.openxmlformats.org/officeDocument/2006/relationships" r:id="R2e82ba6c8b9f4822"/>
   </p:notesMasterIdLst>
   <p:sldIdLst>
-    <p:sldId xmlns:r="http://schemas.openxmlformats.org/officeDocument/2006/relationships" id="256" r:id="R5960d4f7791c40fb"/>
+    <p:sldId xmlns:r="http://schemas.openxmlformats.org/officeDocument/2006/relationships" id="256" r:id="R09111db948ed43e5"/>
   </p:sldIdLst>
   <p:sldSz cx="12192000" cy="6858000"/>
   <p:notesSz cx="6858000" cy="9144000"/>
@@ -524,7 +524,7 @@
   </p:cSld>
   <p:clrMap bg1="lt1" tx1="dk1" bg2="lt2" tx2="dk2" accent1="accent1" accent2="accent2" accent3="accent3" accent4="accent4" accent5="accent5" accent6="accent6" hlink="hlink" folHlink="folHlink"/>
   <p:sldLayoutIdLst>
-    <p:sldLayoutId xmlns:r="http://schemas.openxmlformats.org/officeDocument/2006/relationships" id="2147483649" r:id="R905cb5c8ca124664"/>
+    <p:sldLayoutId xmlns:r="http://schemas.openxmlformats.org/officeDocument/2006/relationships" id="2147483649" r:id="R7a4ac13ce382438f"/>
   </p:sldLayoutIdLst>
   <p:txStyles>
     <p:titleStyle>
@@ -1093,7 +1093,7 @@
           <p:cNvPr id="43" name="alignment-field-underlay">
             <a:extLst xmlns:a="http://schemas.openxmlformats.org/drawingml/2006/main">
               <a:ext uri="{FF2B5EF4-FFF2-40B4-BE49-F238E27FC236}">
-                <a16:creationId xmlns:a16="http://schemas.microsoft.com/office/drawing/2014/main" id="{5C87AB8C-DAF1-4A56-A294-EA52C28FE442}"/>
+                <a16:creationId xmlns:a16="http://schemas.microsoft.com/office/drawing/2014/main" id="{DB50511A-F596-4634-9B0E-A112384E7D50}"/>
               </a:ext>
             </a:extLst>
           </p:cNvPr>
@@ -1126,7 +1126,7 @@
           <p:cNvPr id="2" name="alignment-field">
             <a:extLst xmlns:a="http://schemas.openxmlformats.org/drawingml/2006/main">
               <a:ext uri="{FF2B5EF4-FFF2-40B4-BE49-F238E27FC236}">
-                <a16:creationId xmlns:a16="http://schemas.microsoft.com/office/drawing/2014/main" id="{ACD3CEB5-3754-47B7-B11A-F5D9BE50AD97}"/>
+                <a16:creationId xmlns:a16="http://schemas.microsoft.com/office/drawing/2014/main" id="{AFDB30BD-0597-410B-891C-06D61C3A2DBA}"/>
               </a:ext>
             </a:extLst>
           </p:cNvPr>
@@ -1167,18 +1167,18 @@
           <p:cNvPr id="3" name="goal-title">
             <a:extLst xmlns:a="http://schemas.openxmlformats.org/drawingml/2006/main">
               <a:ext uri="{FF2B5EF4-FFF2-40B4-BE49-F238E27FC236}">
-                <a16:creationId xmlns:a16="http://schemas.microsoft.com/office/drawing/2014/main" id="{16715135-7346-496A-92F1-AE3EA4BC0BA8}"/>
-              </a:ext>
-            </a:extLst>
-          </p:cNvPr>
-          <p:cNvSpPr>
-            <a:spLocks xmlns:a="http://schemas.openxmlformats.org/drawingml/2006/main" noGrp="1"/>
-          </p:cNvSpPr>
-          <p:nvPr/>
-        </p:nvSpPr>
-        <p:spPr>
-          <a:xfrm xmlns:a="http://schemas.openxmlformats.org/drawingml/2006/main" rot="0">
-            <a:off x="2286000" y="1715691"/>
+                <a16:creationId xmlns:a16="http://schemas.microsoft.com/office/drawing/2014/main" id="{D224BC90-B85A-4AB8-AB29-B40961E3B502}"/>
+              </a:ext>
+            </a:extLst>
+          </p:cNvPr>
+          <p:cNvSpPr>
+            <a:spLocks xmlns:a="http://schemas.openxmlformats.org/drawingml/2006/main" noGrp="1"/>
+          </p:cNvSpPr>
+          <p:nvPr/>
+        </p:nvSpPr>
+        <p:spPr>
+          <a:xfrm xmlns:a="http://schemas.openxmlformats.org/drawingml/2006/main" rot="0">
+            <a:off x="2286000" y="1706166"/>
             <a:ext cx="7620000" cy="298694"/>
           </a:xfrm>
           <a:prstGeom xmlns:a="http://schemas.openxmlformats.org/drawingml/2006/main" prst="rect">
@@ -1191,7 +1191,7 @@
           </a:ln>
         </p:spPr>
         <p:txBody>
-          <a:bodyPr xmlns:a="http://schemas.openxmlformats.org/drawingml/2006/main" wrap="square" lIns="0" tIns="0" rIns="0" bIns="0" anchor="ctr">
+          <a:bodyPr xmlns:a="http://schemas.openxmlformats.org/drawingml/2006/main" wrap="none" lIns="0" tIns="0" rIns="0" bIns="0" anchor="ctr">
             <a:noAutofit/>
           </a:bodyPr>
           <a:lstStyle xmlns:a="http://schemas.openxmlformats.org/drawingml/2006/main"/>
@@ -1229,19 +1229,19 @@
           <p:cNvPr id="4" name="goal-body">
             <a:extLst xmlns:a="http://schemas.openxmlformats.org/drawingml/2006/main">
               <a:ext uri="{FF2B5EF4-FFF2-40B4-BE49-F238E27FC236}">
-                <a16:creationId xmlns:a16="http://schemas.microsoft.com/office/drawing/2014/main" id="{5E4504E8-1D9A-4E30-9D49-F05CB20C55E2}"/>
-              </a:ext>
-            </a:extLst>
-          </p:cNvPr>
-          <p:cNvSpPr>
-            <a:spLocks xmlns:a="http://schemas.openxmlformats.org/drawingml/2006/main" noGrp="1"/>
-          </p:cNvSpPr>
-          <p:nvPr/>
-        </p:nvSpPr>
-        <p:spPr>
-          <a:xfrm xmlns:a="http://schemas.openxmlformats.org/drawingml/2006/main" rot="0">
-            <a:off x="2286000" y="2062010"/>
-            <a:ext cx="7620000" cy="241849"/>
+                <a16:creationId xmlns:a16="http://schemas.microsoft.com/office/drawing/2014/main" id="{A800589E-4E70-4B21-A076-3565643B63A6}"/>
+              </a:ext>
+            </a:extLst>
+          </p:cNvPr>
+          <p:cNvSpPr>
+            <a:spLocks xmlns:a="http://schemas.openxmlformats.org/drawingml/2006/main" noGrp="1"/>
+          </p:cNvSpPr>
+          <p:nvPr/>
+        </p:nvSpPr>
+        <p:spPr>
+          <a:xfrm xmlns:a="http://schemas.openxmlformats.org/drawingml/2006/main" rot="0">
+            <a:off x="2286000" y="2100110"/>
+            <a:ext cx="7620000" cy="213274"/>
           </a:xfrm>
           <a:prstGeom xmlns:a="http://schemas.openxmlformats.org/drawingml/2006/main" prst="rect">
             <a:avLst/>
@@ -1253,7 +1253,7 @@
           </a:ln>
         </p:spPr>
         <p:txBody>
-          <a:bodyPr xmlns:a="http://schemas.openxmlformats.org/drawingml/2006/main" wrap="square" lIns="0" tIns="0" rIns="0" bIns="0" anchor="ctr">
+          <a:bodyPr xmlns:a="http://schemas.openxmlformats.org/drawingml/2006/main" wrap="none" lIns="0" tIns="0" rIns="0" bIns="0" anchor="ctr">
             <a:noAutofit/>
           </a:bodyPr>
           <a:lstStyle xmlns:a="http://schemas.openxmlformats.org/drawingml/2006/main"/>
@@ -1263,7 +1263,7 @@
                 <a:spcPct val="112000"/>
               </a:lnSpc>
               <a:buNone/>
-              <a:defRPr sz="1700" b="0" i="0">
+              <a:defRPr sz="1500" b="0" i="0">
                 <a:solidFill>
                   <a:srgbClr val="60758D"/>
                 </a:solidFill>
@@ -1273,7 +1273,7 @@
               </a:defRPr>
             </a:pPr>
             <a:r>
-              <a:rPr sz="1700" b="0" i="0">
+              <a:rPr sz="1500" b="0" i="0">
                 <a:solidFill>
                   <a:srgbClr val="60758D"/>
                 </a:solidFill>
@@ -1291,7 +1291,7 @@
           <p:cNvPr id="5" name="alignment-accent">
             <a:extLst xmlns:a="http://schemas.openxmlformats.org/drawingml/2006/main">
               <a:ext uri="{FF2B5EF4-FFF2-40B4-BE49-F238E27FC236}">
-                <a16:creationId xmlns:a16="http://schemas.microsoft.com/office/drawing/2014/main" id="{EC4CD132-B19D-4980-B290-29E8BEBA32F0}"/>
+                <a16:creationId xmlns:a16="http://schemas.microsoft.com/office/drawing/2014/main" id="{EDBD1F35-F5F9-44A6-841B-74D55FE506A4}"/>
               </a:ext>
             </a:extLst>
           </p:cNvPr>
@@ -1335,7 +1335,7 @@
           <p:cNvPr id="6" name="metric-band-underlay">
             <a:extLst xmlns:a="http://schemas.openxmlformats.org/drawingml/2006/main">
               <a:ext uri="{FF2B5EF4-FFF2-40B4-BE49-F238E27FC236}">
-                <a16:creationId xmlns:a16="http://schemas.microsoft.com/office/drawing/2014/main" id="{AB0DCB68-4A78-41B3-A0F5-5898020473F5}"/>
+                <a16:creationId xmlns:a16="http://schemas.microsoft.com/office/drawing/2014/main" id="{BEA475E7-E9E9-49BB-857C-7C685AC171FD}"/>
               </a:ext>
             </a:extLst>
           </p:cNvPr>
@@ -1368,7 +1368,7 @@
           <p:cNvPr id="7" name="strategy-1-order-disc">
             <a:extLst xmlns:a="http://schemas.openxmlformats.org/drawingml/2006/main">
               <a:ext uri="{FF2B5EF4-FFF2-40B4-BE49-F238E27FC236}">
-                <a16:creationId xmlns:a16="http://schemas.microsoft.com/office/drawing/2014/main" id="{55437F10-2CED-4670-9FEF-CFC5F3DCCA10}"/>
+                <a16:creationId xmlns:a16="http://schemas.microsoft.com/office/drawing/2014/main" id="{90025E72-FC69-4804-894C-F631A8FA1C5F}"/>
               </a:ext>
             </a:extLst>
           </p:cNvPr>
@@ -1401,7 +1401,7 @@
           <p:cNvPr id="8" name="strategy-1-order-core">
             <a:extLst xmlns:a="http://schemas.openxmlformats.org/drawingml/2006/main">
               <a:ext uri="{FF2B5EF4-FFF2-40B4-BE49-F238E27FC236}">
-                <a16:creationId xmlns:a16="http://schemas.microsoft.com/office/drawing/2014/main" id="{B77559F7-3325-48E6-9EE8-6D2026527C53}"/>
+                <a16:creationId xmlns:a16="http://schemas.microsoft.com/office/drawing/2014/main" id="{8B673163-CD1D-4A2B-B3C1-E9529828B2CA}"/>
               </a:ext>
             </a:extLst>
           </p:cNvPr>
@@ -1438,7 +1438,7 @@
           <p:cNvPr id="9" name="strategy-1-order">
             <a:extLst xmlns:a="http://schemas.openxmlformats.org/drawingml/2006/main">
               <a:ext uri="{FF2B5EF4-FFF2-40B4-BE49-F238E27FC236}">
-                <a16:creationId xmlns:a16="http://schemas.microsoft.com/office/drawing/2014/main" id="{91CA3603-89ED-4B5A-A656-42B1969D2971}"/>
+                <a16:creationId xmlns:a16="http://schemas.microsoft.com/office/drawing/2014/main" id="{7F7C01D2-8FF6-428E-833D-112A83BEFF01}"/>
               </a:ext>
             </a:extLst>
           </p:cNvPr>
@@ -1500,19 +1500,19 @@
           <p:cNvPr id="10" name="strategy-1-title">
             <a:extLst xmlns:a="http://schemas.openxmlformats.org/drawingml/2006/main">
               <a:ext uri="{FF2B5EF4-FFF2-40B4-BE49-F238E27FC236}">
-                <a16:creationId xmlns:a16="http://schemas.microsoft.com/office/drawing/2014/main" id="{0E1BA1E0-D9D0-4F68-8173-6157F9E94B52}"/>
-              </a:ext>
-            </a:extLst>
-          </p:cNvPr>
-          <p:cNvSpPr>
-            <a:spLocks xmlns:a="http://schemas.openxmlformats.org/drawingml/2006/main" noGrp="1"/>
-          </p:cNvSpPr>
-          <p:nvPr/>
-        </p:nvSpPr>
-        <p:spPr>
-          <a:xfrm xmlns:a="http://schemas.openxmlformats.org/drawingml/2006/main" rot="0">
-            <a:off x="1771650" y="3384204"/>
-            <a:ext cx="2425598" cy="306591"/>
+                <a16:creationId xmlns:a16="http://schemas.microsoft.com/office/drawing/2014/main" id="{1556B8C9-FA2D-462C-88ED-ABBE3D9362C3}"/>
+              </a:ext>
+            </a:extLst>
+          </p:cNvPr>
+          <p:cNvSpPr>
+            <a:spLocks xmlns:a="http://schemas.openxmlformats.org/drawingml/2006/main" noGrp="1"/>
+          </p:cNvSpPr>
+          <p:nvPr/>
+        </p:nvSpPr>
+        <p:spPr>
+          <a:xfrm xmlns:a="http://schemas.openxmlformats.org/drawingml/2006/main" rot="0">
+            <a:off x="1771650" y="3452222"/>
+            <a:ext cx="2425598" cy="277416"/>
           </a:xfrm>
           <a:prstGeom xmlns:a="http://schemas.openxmlformats.org/drawingml/2006/main" prst="rect">
             <a:avLst/>
@@ -1524,7 +1524,7 @@
           </a:ln>
         </p:spPr>
         <p:txBody>
-          <a:bodyPr xmlns:a="http://schemas.openxmlformats.org/drawingml/2006/main" wrap="square" lIns="0" tIns="0" rIns="0" bIns="0" anchor="ctr">
+          <a:bodyPr xmlns:a="http://schemas.openxmlformats.org/drawingml/2006/main" wrap="none" lIns="0" tIns="0" rIns="0" bIns="0" anchor="ctr">
             <a:noAutofit/>
           </a:bodyPr>
           <a:lstStyle xmlns:a="http://schemas.openxmlformats.org/drawingml/2006/main"/>
@@ -1534,7 +1534,7 @@
                 <a:spcPct val="115000"/>
               </a:lnSpc>
               <a:buNone/>
-              <a:defRPr sz="2100" b="1" i="0">
+              <a:defRPr sz="1900" b="1" i="0">
                 <a:solidFill>
                   <a:srgbClr val="254B7C"/>
                 </a:solidFill>
@@ -1544,7 +1544,7 @@
               </a:defRPr>
             </a:pPr>
             <a:r>
-              <a:rPr sz="2100" b="1" i="0">
+              <a:rPr sz="1900" b="1" i="0">
                 <a:solidFill>
                   <a:srgbClr val="254B7C"/>
                 </a:solidFill>
@@ -1562,19 +1562,19 @@
           <p:cNvPr id="11" name="strategy-1-body">
             <a:extLst xmlns:a="http://schemas.openxmlformats.org/drawingml/2006/main">
               <a:ext uri="{FF2B5EF4-FFF2-40B4-BE49-F238E27FC236}">
-                <a16:creationId xmlns:a16="http://schemas.microsoft.com/office/drawing/2014/main" id="{BA0096F5-DD47-4520-8FAF-A002E9D44248}"/>
-              </a:ext>
-            </a:extLst>
-          </p:cNvPr>
-          <p:cNvSpPr>
-            <a:spLocks xmlns:a="http://schemas.openxmlformats.org/drawingml/2006/main" noGrp="1"/>
-          </p:cNvSpPr>
-          <p:nvPr/>
-        </p:nvSpPr>
-        <p:spPr>
-          <a:xfrm xmlns:a="http://schemas.openxmlformats.org/drawingml/2006/main" rot="0">
-            <a:off x="1771650" y="3786035"/>
-            <a:ext cx="2425598" cy="906809"/>
+                <a16:creationId xmlns:a16="http://schemas.microsoft.com/office/drawing/2014/main" id="{2533B557-B106-4E0B-93A2-B844B622A555}"/>
+              </a:ext>
+            </a:extLst>
+          </p:cNvPr>
+          <p:cNvSpPr>
+            <a:spLocks xmlns:a="http://schemas.openxmlformats.org/drawingml/2006/main" noGrp="1"/>
+          </p:cNvSpPr>
+          <p:nvPr/>
+        </p:nvSpPr>
+        <p:spPr>
+          <a:xfrm xmlns:a="http://schemas.openxmlformats.org/drawingml/2006/main" rot="0">
+            <a:off x="1771650" y="3824888"/>
+            <a:ext cx="2425598" cy="800100"/>
           </a:xfrm>
           <a:prstGeom xmlns:a="http://schemas.openxmlformats.org/drawingml/2006/main" prst="rect">
             <a:avLst/>
@@ -1596,7 +1596,7 @@
                 <a:spcPct val="140000"/>
               </a:lnSpc>
               <a:buNone/>
-              <a:defRPr sz="1700" b="0" i="0">
+              <a:defRPr sz="1500" b="0" i="0">
                 <a:solidFill>
                   <a:srgbClr val="4C5F75"/>
                 </a:solidFill>
@@ -1606,7 +1606,7 @@
               </a:defRPr>
             </a:pPr>
             <a:r>
-              <a:rPr sz="1700" b="0" i="0">
+              <a:rPr sz="1500" b="0" i="0">
                 <a:solidFill>
                   <a:srgbClr val="4C5F75"/>
                 </a:solidFill>
@@ -1614,7 +1614,7 @@
                 <a:ea typeface="Microsoft YaHei"/>
                 <a:cs typeface="Microsoft YaHei"/>
               </a:rPr>
-              <a:t>把原稿拆成稳定字段，保</a:t>
+              <a:t>把原稿拆成稳定字段，保留</a:t>
             </a:r>
           </a:p>
           <a:p xmlns:a="http://schemas.openxmlformats.org/drawingml/2006/main">
@@ -1623,7 +1623,7 @@
                 <a:spcPct val="140000"/>
               </a:lnSpc>
               <a:buNone/>
-              <a:defRPr sz="1700" b="0" i="0">
+              <a:defRPr sz="1500" b="0" i="0">
                 <a:solidFill>
                   <a:srgbClr val="4C5F75"/>
                 </a:solidFill>
@@ -1633,7 +1633,7 @@
               </a:defRPr>
             </a:pPr>
             <a:r>
-              <a:rPr sz="1700" b="0" i="0">
+              <a:rPr sz="1500" b="0" i="0">
                 <a:solidFill>
                   <a:srgbClr val="4C5F75"/>
                 </a:solidFill>
@@ -1641,7 +1641,7 @@
                 <a:ea typeface="Microsoft YaHei"/>
                 <a:cs typeface="Microsoft YaHei"/>
               </a:rPr>
-              <a:t>留真实逻辑并控制每页信</a:t>
+              <a:t>真实逻辑并控制每页信息密</a:t>
             </a:r>
           </a:p>
           <a:p xmlns:a="http://schemas.openxmlformats.org/drawingml/2006/main">
@@ -1650,7 +1650,7 @@
                 <a:spcPct val="140000"/>
               </a:lnSpc>
               <a:buNone/>
-              <a:defRPr sz="1700" b="0" i="0">
+              <a:defRPr sz="1500" b="0" i="0">
                 <a:solidFill>
                   <a:srgbClr val="4C5F75"/>
                 </a:solidFill>
@@ -1660,7 +1660,7 @@
               </a:defRPr>
             </a:pPr>
             <a:r>
-              <a:rPr sz="1700" b="0" i="0">
+              <a:rPr sz="1500" b="0" i="0">
                 <a:solidFill>
                   <a:srgbClr val="4C5F75"/>
                 </a:solidFill>
@@ -1668,7 +1668,7 @@
                 <a:ea typeface="Microsoft YaHei"/>
                 <a:cs typeface="Microsoft YaHei"/>
               </a:rPr>
-              <a:t>息密度。</a:t>
+              <a:t>度。</a:t>
             </a:r>
           </a:p>
         </p:txBody>
@@ -1678,7 +1678,7 @@
           <p:cNvPr id="12" name="strategy-2-divider">
             <a:extLst xmlns:a="http://schemas.openxmlformats.org/drawingml/2006/main">
               <a:ext uri="{FF2B5EF4-FFF2-40B4-BE49-F238E27FC236}">
-                <a16:creationId xmlns:a16="http://schemas.microsoft.com/office/drawing/2014/main" id="{88E3F8F4-35B2-414D-903B-0740FEC6A4D5}"/>
+                <a16:creationId xmlns:a16="http://schemas.microsoft.com/office/drawing/2014/main" id="{8CEABC0C-2F4F-4957-9FA4-A9FBFC3EEA2D}"/>
               </a:ext>
             </a:extLst>
           </p:cNvPr>
@@ -1709,7 +1709,7 @@
           <p:cNvPr id="13" name="strategy-2-order-disc">
             <a:extLst xmlns:a="http://schemas.openxmlformats.org/drawingml/2006/main">
               <a:ext uri="{FF2B5EF4-FFF2-40B4-BE49-F238E27FC236}">
-                <a16:creationId xmlns:a16="http://schemas.microsoft.com/office/drawing/2014/main" id="{F21195CB-2E4A-41E0-A5DA-6D0405A7B4AA}"/>
+                <a16:creationId xmlns:a16="http://schemas.microsoft.com/office/drawing/2014/main" id="{802A9EB3-22AA-4ABF-8777-8F18F3DCBA18}"/>
               </a:ext>
             </a:extLst>
           </p:cNvPr>
@@ -1742,7 +1742,7 @@
           <p:cNvPr id="14" name="strategy-2-order-core">
             <a:extLst xmlns:a="http://schemas.openxmlformats.org/drawingml/2006/main">
               <a:ext uri="{FF2B5EF4-FFF2-40B4-BE49-F238E27FC236}">
-                <a16:creationId xmlns:a16="http://schemas.microsoft.com/office/drawing/2014/main" id="{E101A306-D1A8-40F6-8D67-8A4D68CDEA1C}"/>
+                <a16:creationId xmlns:a16="http://schemas.microsoft.com/office/drawing/2014/main" id="{0D0E5963-3ABC-4982-96F5-8F3989905984}"/>
               </a:ext>
             </a:extLst>
           </p:cNvPr>
@@ -1779,7 +1779,7 @@
           <p:cNvPr id="15" name="strategy-2-order">
             <a:extLst xmlns:a="http://schemas.openxmlformats.org/drawingml/2006/main">
               <a:ext uri="{FF2B5EF4-FFF2-40B4-BE49-F238E27FC236}">
-                <a16:creationId xmlns:a16="http://schemas.microsoft.com/office/drawing/2014/main" id="{D1046B78-2D71-478F-95D7-EBB4D1060233}"/>
+                <a16:creationId xmlns:a16="http://schemas.microsoft.com/office/drawing/2014/main" id="{FD195566-C1C2-405F-952E-A0E7EEEA4E1C}"/>
               </a:ext>
             </a:extLst>
           </p:cNvPr>
@@ -1841,19 +1841,19 @@
           <p:cNvPr id="16" name="strategy-2-title">
             <a:extLst xmlns:a="http://schemas.openxmlformats.org/drawingml/2006/main">
               <a:ext uri="{FF2B5EF4-FFF2-40B4-BE49-F238E27FC236}">
-                <a16:creationId xmlns:a16="http://schemas.microsoft.com/office/drawing/2014/main" id="{7487A251-7EB0-4E73-92EB-6604FDACB547}"/>
-              </a:ext>
-            </a:extLst>
-          </p:cNvPr>
-          <p:cNvSpPr>
-            <a:spLocks xmlns:a="http://schemas.openxmlformats.org/drawingml/2006/main" noGrp="1"/>
-          </p:cNvSpPr>
-          <p:nvPr/>
-        </p:nvSpPr>
-        <p:spPr>
-          <a:xfrm xmlns:a="http://schemas.openxmlformats.org/drawingml/2006/main" rot="0">
-            <a:off x="4883048" y="3384204"/>
-            <a:ext cx="2425751" cy="306591"/>
+                <a16:creationId xmlns:a16="http://schemas.microsoft.com/office/drawing/2014/main" id="{092F8E4C-435D-4ACC-8117-EB0FA43E7679}"/>
+              </a:ext>
+            </a:extLst>
+          </p:cNvPr>
+          <p:cNvSpPr>
+            <a:spLocks xmlns:a="http://schemas.openxmlformats.org/drawingml/2006/main" noGrp="1"/>
+          </p:cNvSpPr>
+          <p:nvPr/>
+        </p:nvSpPr>
+        <p:spPr>
+          <a:xfrm xmlns:a="http://schemas.openxmlformats.org/drawingml/2006/main" rot="0">
+            <a:off x="4883048" y="3585572"/>
+            <a:ext cx="2425751" cy="277416"/>
           </a:xfrm>
           <a:prstGeom xmlns:a="http://schemas.openxmlformats.org/drawingml/2006/main" prst="rect">
             <a:avLst/>
@@ -1865,7 +1865,7 @@
           </a:ln>
         </p:spPr>
         <p:txBody>
-          <a:bodyPr xmlns:a="http://schemas.openxmlformats.org/drawingml/2006/main" wrap="square" lIns="0" tIns="0" rIns="0" bIns="0" anchor="ctr">
+          <a:bodyPr xmlns:a="http://schemas.openxmlformats.org/drawingml/2006/main" wrap="none" lIns="0" tIns="0" rIns="0" bIns="0" anchor="ctr">
             <a:noAutofit/>
           </a:bodyPr>
           <a:lstStyle xmlns:a="http://schemas.openxmlformats.org/drawingml/2006/main"/>
@@ -1875,7 +1875,7 @@
                 <a:spcPct val="115000"/>
               </a:lnSpc>
               <a:buNone/>
-              <a:defRPr sz="2100" b="1" i="0">
+              <a:defRPr sz="1900" b="1" i="0">
                 <a:solidFill>
                   <a:srgbClr val="254B7C"/>
                 </a:solidFill>
@@ -1885,7 +1885,7 @@
               </a:defRPr>
             </a:pPr>
             <a:r>
-              <a:rPr sz="2100" b="1" i="0">
+              <a:rPr sz="1900" b="1" i="0">
                 <a:solidFill>
                   <a:srgbClr val="254B7C"/>
                 </a:solidFill>
@@ -1903,19 +1903,19 @@
           <p:cNvPr id="17" name="strategy-2-body">
             <a:extLst xmlns:a="http://schemas.openxmlformats.org/drawingml/2006/main">
               <a:ext uri="{FF2B5EF4-FFF2-40B4-BE49-F238E27FC236}">
-                <a16:creationId xmlns:a16="http://schemas.microsoft.com/office/drawing/2014/main" id="{05878A9F-1E70-4DA7-B1FD-EB0778490D5B}"/>
-              </a:ext>
-            </a:extLst>
-          </p:cNvPr>
-          <p:cNvSpPr>
-            <a:spLocks xmlns:a="http://schemas.openxmlformats.org/drawingml/2006/main" noGrp="1"/>
-          </p:cNvSpPr>
-          <p:nvPr/>
-        </p:nvSpPr>
-        <p:spPr>
-          <a:xfrm xmlns:a="http://schemas.openxmlformats.org/drawingml/2006/main" rot="0">
-            <a:off x="4883048" y="3786035"/>
-            <a:ext cx="2425751" cy="906809"/>
+                <a16:creationId xmlns:a16="http://schemas.microsoft.com/office/drawing/2014/main" id="{C19393E8-12D1-4B32-8480-FD1143469620}"/>
+              </a:ext>
+            </a:extLst>
+          </p:cNvPr>
+          <p:cNvSpPr>
+            <a:spLocks xmlns:a="http://schemas.openxmlformats.org/drawingml/2006/main" noGrp="1"/>
+          </p:cNvSpPr>
+          <p:nvPr/>
+        </p:nvSpPr>
+        <p:spPr>
+          <a:xfrm xmlns:a="http://schemas.openxmlformats.org/drawingml/2006/main" rot="0">
+            <a:off x="4883048" y="3958238"/>
+            <a:ext cx="2425751" cy="533400"/>
           </a:xfrm>
           <a:prstGeom xmlns:a="http://schemas.openxmlformats.org/drawingml/2006/main" prst="rect">
             <a:avLst/>
@@ -1937,7 +1937,7 @@
                 <a:spcPct val="140000"/>
               </a:lnSpc>
               <a:buNone/>
-              <a:defRPr sz="1700" b="0" i="0">
+              <a:defRPr sz="1500" b="0" i="0">
                 <a:solidFill>
                   <a:srgbClr val="4C5F75"/>
                 </a:solidFill>
@@ -1947,7 +1947,7 @@
               </a:defRPr>
             </a:pPr>
             <a:r>
-              <a:rPr sz="1700" b="0" i="0">
+              <a:rPr sz="1500" b="0" i="0">
                 <a:solidFill>
                   <a:srgbClr val="4C5F75"/>
                 </a:solidFill>
@@ -1955,7 +1955,7 @@
                 <a:ea typeface="Microsoft YaHei"/>
                 <a:cs typeface="Microsoft YaHei"/>
               </a:rPr>
-              <a:t>把常用逻辑固化为组件，</a:t>
+              <a:t>把常用逻辑固化为组件，统</a:t>
             </a:r>
           </a:p>
           <a:p xmlns:a="http://schemas.openxmlformats.org/drawingml/2006/main">
@@ -1964,7 +1964,7 @@
                 <a:spcPct val="140000"/>
               </a:lnSpc>
               <a:buNone/>
-              <a:defRPr sz="1700" b="0" i="0">
+              <a:defRPr sz="1500" b="0" i="0">
                 <a:solidFill>
                   <a:srgbClr val="4C5F75"/>
                 </a:solidFill>
@@ -1974,7 +1974,7 @@
               </a:defRPr>
             </a:pPr>
             <a:r>
-              <a:rPr sz="1700" b="0" i="0">
+              <a:rPr sz="1500" b="0" i="0">
                 <a:solidFill>
                   <a:srgbClr val="4C5F75"/>
                 </a:solidFill>
@@ -1982,34 +1982,7 @@
                 <a:ea typeface="Microsoft YaHei"/>
                 <a:cs typeface="Microsoft YaHei"/>
               </a:rPr>
-              <a:t>统一字号、版心与连接语</a:t>
-            </a:r>
-          </a:p>
-          <a:p xmlns:a="http://schemas.openxmlformats.org/drawingml/2006/main">
-            <a:pPr algn="ctr">
-              <a:lnSpc>
-                <a:spcPct val="140000"/>
-              </a:lnSpc>
-              <a:buNone/>
-              <a:defRPr sz="1700" b="0" i="0">
-                <a:solidFill>
-                  <a:srgbClr val="4C5F75"/>
-                </a:solidFill>
-                <a:latin typeface="Microsoft YaHei"/>
-                <a:ea typeface="Microsoft YaHei"/>
-                <a:cs typeface="Microsoft YaHei"/>
-              </a:defRPr>
-            </a:pPr>
-            <a:r>
-              <a:rPr sz="1700" b="0" i="0">
-                <a:solidFill>
-                  <a:srgbClr val="4C5F75"/>
-                </a:solidFill>
-                <a:latin typeface="Microsoft YaHei"/>
-                <a:ea typeface="Microsoft YaHei"/>
-                <a:cs typeface="Microsoft YaHei"/>
-              </a:rPr>
-              <a:t>法。</a:t>
+              <a:t>一字号、版心与连接语法。</a:t>
             </a:r>
           </a:p>
         </p:txBody>
@@ -2019,7 +1992,7 @@
           <p:cNvPr id="18" name="strategy-3-divider">
             <a:extLst xmlns:a="http://schemas.openxmlformats.org/drawingml/2006/main">
               <a:ext uri="{FF2B5EF4-FFF2-40B4-BE49-F238E27FC236}">
-                <a16:creationId xmlns:a16="http://schemas.microsoft.com/office/drawing/2014/main" id="{6C47D638-F11A-4E26-BBC7-517A27C8C62C}"/>
+                <a16:creationId xmlns:a16="http://schemas.microsoft.com/office/drawing/2014/main" id="{583970B9-552B-4E12-AE07-62FC9C6DF11C}"/>
               </a:ext>
             </a:extLst>
           </p:cNvPr>
@@ -2050,7 +2023,7 @@
           <p:cNvPr id="19" name="strategy-3-order-disc">
             <a:extLst xmlns:a="http://schemas.openxmlformats.org/drawingml/2006/main">
               <a:ext uri="{FF2B5EF4-FFF2-40B4-BE49-F238E27FC236}">
-                <a16:creationId xmlns:a16="http://schemas.microsoft.com/office/drawing/2014/main" id="{C1D782CB-E6EB-4D89-A648-3B7E4B2A0363}"/>
+                <a16:creationId xmlns:a16="http://schemas.microsoft.com/office/drawing/2014/main" id="{0A42D6B4-4A60-4455-BAF0-CA6F02156490}"/>
               </a:ext>
             </a:extLst>
           </p:cNvPr>
@@ -2083,7 +2056,7 @@
           <p:cNvPr id="20" name="strategy-3-order-core">
             <a:extLst xmlns:a="http://schemas.openxmlformats.org/drawingml/2006/main">
               <a:ext uri="{FF2B5EF4-FFF2-40B4-BE49-F238E27FC236}">
-                <a16:creationId xmlns:a16="http://schemas.microsoft.com/office/drawing/2014/main" id="{9217EF40-81E9-448B-A1E5-D220FA60F5B3}"/>
+                <a16:creationId xmlns:a16="http://schemas.microsoft.com/office/drawing/2014/main" id="{F52E81A6-95D7-4E13-948F-D9CB6C1845E0}"/>
               </a:ext>
             </a:extLst>
           </p:cNvPr>
@@ -2120,7 +2093,7 @@
           <p:cNvPr id="21" name="strategy-3-order">
             <a:extLst xmlns:a="http://schemas.openxmlformats.org/drawingml/2006/main">
               <a:ext uri="{FF2B5EF4-FFF2-40B4-BE49-F238E27FC236}">
-                <a16:creationId xmlns:a16="http://schemas.microsoft.com/office/drawing/2014/main" id="{E6AA2E14-2A98-4A9A-BCB6-DA59D7339B83}"/>
+                <a16:creationId xmlns:a16="http://schemas.microsoft.com/office/drawing/2014/main" id="{DFD7404E-F764-41D4-AD7C-EA5A5DC1C2EE}"/>
               </a:ext>
             </a:extLst>
           </p:cNvPr>
@@ -2182,273 +2155,19 @@
           <p:cNvPr id="22" name="strategy-3-title">
             <a:extLst xmlns:a="http://schemas.openxmlformats.org/drawingml/2006/main">
               <a:ext uri="{FF2B5EF4-FFF2-40B4-BE49-F238E27FC236}">
-                <a16:creationId xmlns:a16="http://schemas.microsoft.com/office/drawing/2014/main" id="{5EFBFC26-A2FB-400D-970F-7E88F64CCAB1}"/>
-              </a:ext>
-            </a:extLst>
-          </p:cNvPr>
-          <p:cNvSpPr>
-            <a:spLocks xmlns:a="http://schemas.openxmlformats.org/drawingml/2006/main" noGrp="1"/>
-          </p:cNvSpPr>
-          <p:nvPr/>
-        </p:nvSpPr>
-        <p:spPr>
-          <a:xfrm xmlns:a="http://schemas.openxmlformats.org/drawingml/2006/main" rot="0">
-            <a:off x="7994599" y="3384204"/>
-            <a:ext cx="2425598" cy="306591"/>
-          </a:xfrm>
-          <a:prstGeom xmlns:a="http://schemas.openxmlformats.org/drawingml/2006/main" prst="rect">
-            <a:avLst/>
-          </a:prstGeom>
-          <a:noFill xmlns:a="http://schemas.openxmlformats.org/drawingml/2006/main"/>
-          <a:ln xmlns:a="http://schemas.openxmlformats.org/drawingml/2006/main" w="0">
-            <a:noFill/>
-            <a:prstDash val="solid"/>
-          </a:ln>
-        </p:spPr>
-        <p:txBody>
-          <a:bodyPr xmlns:a="http://schemas.openxmlformats.org/drawingml/2006/main" wrap="square" lIns="0" tIns="0" rIns="0" bIns="0" anchor="ctr">
-            <a:noAutofit/>
-          </a:bodyPr>
-          <a:lstStyle xmlns:a="http://schemas.openxmlformats.org/drawingml/2006/main"/>
-          <a:p xmlns:a="http://schemas.openxmlformats.org/drawingml/2006/main">
-            <a:pPr algn="ctr">
-              <a:lnSpc>
-                <a:spcPct val="115000"/>
-              </a:lnSpc>
-              <a:buNone/>
-              <a:defRPr sz="2100" b="1" i="0">
-                <a:solidFill>
-                  <a:srgbClr val="254B7C"/>
-                </a:solidFill>
-                <a:latin typeface="Microsoft YaHei"/>
-                <a:ea typeface="Microsoft YaHei"/>
-                <a:cs typeface="Microsoft YaHei"/>
-              </a:defRPr>
-            </a:pPr>
-            <a:r>
-              <a:rPr sz="2100" b="1" i="0">
-                <a:solidFill>
-                  <a:srgbClr val="254B7C"/>
-                </a:solidFill>
-                <a:latin typeface="Microsoft YaHei"/>
-                <a:ea typeface="Microsoft YaHei"/>
-                <a:cs typeface="Microsoft YaHei"/>
-              </a:rPr>
-              <a:t>生成工程化</a:t>
-            </a:r>
-          </a:p>
-        </p:txBody>
-      </p:sp>
-      <p:sp>
-        <p:nvSpPr>
-          <p:cNvPr id="23" name="strategy-3-body">
-            <a:extLst xmlns:a="http://schemas.openxmlformats.org/drawingml/2006/main">
-              <a:ext uri="{FF2B5EF4-FFF2-40B4-BE49-F238E27FC236}">
-                <a16:creationId xmlns:a16="http://schemas.microsoft.com/office/drawing/2014/main" id="{9AEAEA64-88E9-4F66-88DC-EF78378E220A}"/>
-              </a:ext>
-            </a:extLst>
-          </p:cNvPr>
-          <p:cNvSpPr>
-            <a:spLocks xmlns:a="http://schemas.openxmlformats.org/drawingml/2006/main" noGrp="1"/>
-          </p:cNvSpPr>
-          <p:nvPr/>
-        </p:nvSpPr>
-        <p:spPr>
-          <a:xfrm xmlns:a="http://schemas.openxmlformats.org/drawingml/2006/main" rot="0">
-            <a:off x="7994599" y="3786035"/>
-            <a:ext cx="2425598" cy="906809"/>
-          </a:xfrm>
-          <a:prstGeom xmlns:a="http://schemas.openxmlformats.org/drawingml/2006/main" prst="rect">
-            <a:avLst/>
-          </a:prstGeom>
-          <a:noFill xmlns:a="http://schemas.openxmlformats.org/drawingml/2006/main"/>
-          <a:ln xmlns:a="http://schemas.openxmlformats.org/drawingml/2006/main" w="0">
-            <a:noFill/>
-            <a:prstDash val="solid"/>
-          </a:ln>
-        </p:spPr>
-        <p:txBody>
-          <a:bodyPr xmlns:a="http://schemas.openxmlformats.org/drawingml/2006/main" wrap="square" lIns="0" tIns="0" rIns="0" bIns="0" anchor="ctr">
-            <a:noAutofit/>
-          </a:bodyPr>
-          <a:lstStyle xmlns:a="http://schemas.openxmlformats.org/drawingml/2006/main"/>
-          <a:p xmlns:a="http://schemas.openxmlformats.org/drawingml/2006/main">
-            <a:pPr algn="ctr">
-              <a:lnSpc>
-                <a:spcPct val="140000"/>
-              </a:lnSpc>
-              <a:buNone/>
-              <a:defRPr sz="1700" b="0" i="0">
-                <a:solidFill>
-                  <a:srgbClr val="4C5F75"/>
-                </a:solidFill>
-                <a:latin typeface="Microsoft YaHei"/>
-                <a:ea typeface="Microsoft YaHei"/>
-                <a:cs typeface="Microsoft YaHei"/>
-              </a:defRPr>
-            </a:pPr>
-            <a:r>
-              <a:rPr sz="1700" b="0" i="0">
-                <a:solidFill>
-                  <a:srgbClr val="4C5F75"/>
-                </a:solidFill>
-                <a:latin typeface="Microsoft YaHei"/>
-                <a:ea typeface="Microsoft YaHei"/>
-                <a:cs typeface="Microsoft YaHei"/>
-              </a:rPr>
-              <a:t>确定性排版交付，保证结</a:t>
-            </a:r>
-          </a:p>
-          <a:p xmlns:a="http://schemas.openxmlformats.org/drawingml/2006/main">
-            <a:pPr algn="ctr">
-              <a:lnSpc>
-                <a:spcPct val="140000"/>
-              </a:lnSpc>
-              <a:buNone/>
-              <a:defRPr sz="1700" b="0" i="0">
-                <a:solidFill>
-                  <a:srgbClr val="4C5F75"/>
-                </a:solidFill>
-                <a:latin typeface="Microsoft YaHei"/>
-                <a:ea typeface="Microsoft YaHei"/>
-                <a:cs typeface="Microsoft YaHei"/>
-              </a:defRPr>
-            </a:pPr>
-            <a:r>
-              <a:rPr sz="1700" b="0" i="0">
-                <a:solidFill>
-                  <a:srgbClr val="4C5F75"/>
-                </a:solidFill>
-                <a:latin typeface="Microsoft YaHei"/>
-                <a:ea typeface="Microsoft YaHei"/>
-                <a:cs typeface="Microsoft YaHei"/>
-              </a:rPr>
-              <a:t>果稳定、可编辑、可重</a:t>
-            </a:r>
-          </a:p>
-          <a:p xmlns:a="http://schemas.openxmlformats.org/drawingml/2006/main">
-            <a:pPr algn="ctr">
-              <a:lnSpc>
-                <a:spcPct val="140000"/>
-              </a:lnSpc>
-              <a:buNone/>
-              <a:defRPr sz="1700" b="0" i="0">
-                <a:solidFill>
-                  <a:srgbClr val="4C5F75"/>
-                </a:solidFill>
-                <a:latin typeface="Microsoft YaHei"/>
-                <a:ea typeface="Microsoft YaHei"/>
-                <a:cs typeface="Microsoft YaHei"/>
-              </a:defRPr>
-            </a:pPr>
-            <a:r>
-              <a:rPr sz="1700" b="0" i="0">
-                <a:solidFill>
-                  <a:srgbClr val="4C5F75"/>
-                </a:solidFill>
-                <a:latin typeface="Microsoft YaHei"/>
-                <a:ea typeface="Microsoft YaHei"/>
-                <a:cs typeface="Microsoft YaHei"/>
-              </a:rPr>
-              <a:t>复。</a:t>
-            </a:r>
-          </a:p>
-        </p:txBody>
-      </p:sp>
-      <p:sp>
-        <p:nvSpPr>
-          <p:cNvPr id="24" name="metric-band">
-            <a:extLst xmlns:a="http://schemas.openxmlformats.org/drawingml/2006/main">
-              <a:ext uri="{FF2B5EF4-FFF2-40B4-BE49-F238E27FC236}">
-                <a16:creationId xmlns:a16="http://schemas.microsoft.com/office/drawing/2014/main" id="{610E4252-3AA6-4CB6-9577-31F4F5D136CD}"/>
-              </a:ext>
-            </a:extLst>
-          </p:cNvPr>
-          <p:cNvSpPr>
-            <a:spLocks xmlns:a="http://schemas.openxmlformats.org/drawingml/2006/main" noGrp="1"/>
-          </p:cNvSpPr>
-          <p:nvPr/>
-        </p:nvSpPr>
-        <p:spPr>
-          <a:xfrm xmlns:a="http://schemas.openxmlformats.org/drawingml/2006/main" rot="0">
-            <a:off x="1600200" y="4905375"/>
-            <a:ext cx="8991600" cy="952500"/>
-          </a:xfrm>
-          <a:prstGeom xmlns:a="http://schemas.openxmlformats.org/drawingml/2006/main" prst="roundRect">
-            <a:avLst>
-              <a:gd name="adj" fmla="val 18000"/>
-            </a:avLst>
-          </a:prstGeom>
-          <a:solidFill xmlns:a="http://schemas.openxmlformats.org/drawingml/2006/main">
-            <a:srgbClr val="E9F2FC"/>
-          </a:solidFill>
-          <a:ln xmlns:a="http://schemas.openxmlformats.org/drawingml/2006/main" w="9525">
-            <a:solidFill>
-              <a:srgbClr val="C9DCEF"/>
-            </a:solidFill>
-            <a:prstDash val="solid"/>
-          </a:ln>
-        </p:spPr>
-      </p:sp>
-      <p:sp>
-        <p:nvSpPr>
-          <p:cNvPr id="25" name="metric-band-accent">
-            <a:extLst xmlns:a="http://schemas.openxmlformats.org/drawingml/2006/main">
-              <a:ext uri="{FF2B5EF4-FFF2-40B4-BE49-F238E27FC236}">
-                <a16:creationId xmlns:a16="http://schemas.microsoft.com/office/drawing/2014/main" id="{B14DDAF8-9863-4597-952A-FB18CCE8DB50}"/>
-              </a:ext>
-            </a:extLst>
-          </p:cNvPr>
-          <p:cNvSpPr>
-            <a:spLocks xmlns:a="http://schemas.openxmlformats.org/drawingml/2006/main" noGrp="1"/>
-          </p:cNvSpPr>
-          <p:nvPr/>
-        </p:nvSpPr>
-        <p:spPr>
-          <a:xfrm xmlns:a="http://schemas.openxmlformats.org/drawingml/2006/main" rot="0">
-            <a:off x="1600200" y="4905375"/>
-            <a:ext cx="8991600" cy="57150"/>
-          </a:xfrm>
-          <a:prstGeom xmlns:a="http://schemas.openxmlformats.org/drawingml/2006/main" prst="roundRect">
-            <a:avLst>
-              <a:gd name="adj" fmla="val 50000"/>
-            </a:avLst>
-          </a:prstGeom>
-          <a:gradFill xmlns:a="http://schemas.openxmlformats.org/drawingml/2006/main">
-            <a:gsLst>
-              <a:gs pos="0">
-                <a:srgbClr val="3971B7"/>
-              </a:gs>
-              <a:gs pos="100000">
-                <a:srgbClr val="78AEEF"/>
-              </a:gs>
-            </a:gsLst>
-            <a:lin ang="5400000"/>
-          </a:gradFill>
-          <a:ln xmlns:a="http://schemas.openxmlformats.org/drawingml/2006/main" w="0">
-            <a:noFill/>
-            <a:prstDash val="solid"/>
-          </a:ln>
-        </p:spPr>
-      </p:sp>
-      <p:sp>
-        <p:nvSpPr>
-          <p:cNvPr id="26" name="strategy-1-metric-1-value">
-            <a:extLst xmlns:a="http://schemas.openxmlformats.org/drawingml/2006/main">
-              <a:ext uri="{FF2B5EF4-FFF2-40B4-BE49-F238E27FC236}">
-                <a16:creationId xmlns:a16="http://schemas.microsoft.com/office/drawing/2014/main" id="{A5510A30-26B9-4678-A369-CA43D6359677}"/>
-              </a:ext>
-            </a:extLst>
-          </p:cNvPr>
-          <p:cNvSpPr>
-            <a:spLocks xmlns:a="http://schemas.openxmlformats.org/drawingml/2006/main" noGrp="1"/>
-          </p:cNvSpPr>
-          <p:nvPr/>
-        </p:nvSpPr>
-        <p:spPr>
-          <a:xfrm xmlns:a="http://schemas.openxmlformats.org/drawingml/2006/main" rot="0">
-            <a:off x="1762125" y="5090522"/>
-            <a:ext cx="1250899" cy="277416"/>
+                <a16:creationId xmlns:a16="http://schemas.microsoft.com/office/drawing/2014/main" id="{7ADD3FA3-5495-4841-938A-6749DE32534E}"/>
+              </a:ext>
+            </a:extLst>
+          </p:cNvPr>
+          <p:cNvSpPr>
+            <a:spLocks xmlns:a="http://schemas.openxmlformats.org/drawingml/2006/main" noGrp="1"/>
+          </p:cNvSpPr>
+          <p:nvPr/>
+        </p:nvSpPr>
+        <p:spPr>
+          <a:xfrm xmlns:a="http://schemas.openxmlformats.org/drawingml/2006/main" rot="0">
+            <a:off x="7994599" y="3585572"/>
+            <a:ext cx="2425598" cy="277416"/>
           </a:xfrm>
           <a:prstGeom xmlns:a="http://schemas.openxmlformats.org/drawingml/2006/main" prst="rect">
             <a:avLst/>
@@ -2472,7 +2191,7 @@
               <a:buNone/>
               <a:defRPr sz="1900" b="1" i="0">
                 <a:solidFill>
-                  <a:srgbClr val="2F5EA8"/>
+                  <a:srgbClr val="254B7C"/>
                 </a:solidFill>
                 <a:latin typeface="Microsoft YaHei"/>
                 <a:ea typeface="Microsoft YaHei"/>
@@ -2482,35 +2201,200 @@
             <a:r>
               <a:rPr sz="1900" b="1" i="0">
                 <a:solidFill>
-                  <a:srgbClr val="2F5EA8"/>
+                  <a:srgbClr val="254B7C"/>
                 </a:solidFill>
                 <a:latin typeface="Microsoft YaHei"/>
                 <a:ea typeface="Microsoft YaHei"/>
                 <a:cs typeface="Microsoft YaHei"/>
               </a:rPr>
-              <a:t>≥95%</a:t>
+              <a:t>生成工程化</a:t>
             </a:r>
           </a:p>
         </p:txBody>
       </p:sp>
       <p:sp>
         <p:nvSpPr>
-          <p:cNvPr id="27" name="strategy-1-metric-1-label">
-            <a:extLst xmlns:a="http://schemas.openxmlformats.org/drawingml/2006/main">
-              <a:ext uri="{FF2B5EF4-FFF2-40B4-BE49-F238E27FC236}">
-                <a16:creationId xmlns:a16="http://schemas.microsoft.com/office/drawing/2014/main" id="{FEA89560-C6EA-46F0-B693-04352614ACE3}"/>
-              </a:ext>
-            </a:extLst>
-          </p:cNvPr>
-          <p:cNvSpPr>
-            <a:spLocks xmlns:a="http://schemas.openxmlformats.org/drawingml/2006/main" noGrp="1"/>
-          </p:cNvSpPr>
-          <p:nvPr/>
-        </p:nvSpPr>
-        <p:spPr>
-          <a:xfrm xmlns:a="http://schemas.openxmlformats.org/drawingml/2006/main" rot="0">
-            <a:off x="1762125" y="5415563"/>
-            <a:ext cx="1250899" cy="228600"/>
+          <p:cNvPr id="23" name="strategy-3-body">
+            <a:extLst xmlns:a="http://schemas.openxmlformats.org/drawingml/2006/main">
+              <a:ext uri="{FF2B5EF4-FFF2-40B4-BE49-F238E27FC236}">
+                <a16:creationId xmlns:a16="http://schemas.microsoft.com/office/drawing/2014/main" id="{05087109-ED07-488F-BC68-7EA0E421B6B5}"/>
+              </a:ext>
+            </a:extLst>
+          </p:cNvPr>
+          <p:cNvSpPr>
+            <a:spLocks xmlns:a="http://schemas.openxmlformats.org/drawingml/2006/main" noGrp="1"/>
+          </p:cNvSpPr>
+          <p:nvPr/>
+        </p:nvSpPr>
+        <p:spPr>
+          <a:xfrm xmlns:a="http://schemas.openxmlformats.org/drawingml/2006/main" rot="0">
+            <a:off x="7994599" y="3958238"/>
+            <a:ext cx="2425598" cy="533400"/>
+          </a:xfrm>
+          <a:prstGeom xmlns:a="http://schemas.openxmlformats.org/drawingml/2006/main" prst="rect">
+            <a:avLst/>
+          </a:prstGeom>
+          <a:noFill xmlns:a="http://schemas.openxmlformats.org/drawingml/2006/main"/>
+          <a:ln xmlns:a="http://schemas.openxmlformats.org/drawingml/2006/main" w="0">
+            <a:noFill/>
+            <a:prstDash val="solid"/>
+          </a:ln>
+        </p:spPr>
+        <p:txBody>
+          <a:bodyPr xmlns:a="http://schemas.openxmlformats.org/drawingml/2006/main" wrap="square" lIns="0" tIns="0" rIns="0" bIns="0" anchor="ctr">
+            <a:noAutofit/>
+          </a:bodyPr>
+          <a:lstStyle xmlns:a="http://schemas.openxmlformats.org/drawingml/2006/main"/>
+          <a:p xmlns:a="http://schemas.openxmlformats.org/drawingml/2006/main">
+            <a:pPr algn="ctr">
+              <a:lnSpc>
+                <a:spcPct val="140000"/>
+              </a:lnSpc>
+              <a:buNone/>
+              <a:defRPr sz="1500" b="0" i="0">
+                <a:solidFill>
+                  <a:srgbClr val="4C5F75"/>
+                </a:solidFill>
+                <a:latin typeface="Microsoft YaHei"/>
+                <a:ea typeface="Microsoft YaHei"/>
+                <a:cs typeface="Microsoft YaHei"/>
+              </a:defRPr>
+            </a:pPr>
+            <a:r>
+              <a:rPr sz="1500" b="0" i="0">
+                <a:solidFill>
+                  <a:srgbClr val="4C5F75"/>
+                </a:solidFill>
+                <a:latin typeface="Microsoft YaHei"/>
+                <a:ea typeface="Microsoft YaHei"/>
+                <a:cs typeface="Microsoft YaHei"/>
+              </a:rPr>
+              <a:t>确定性排版交付，保证结果</a:t>
+            </a:r>
+          </a:p>
+          <a:p xmlns:a="http://schemas.openxmlformats.org/drawingml/2006/main">
+            <a:pPr algn="ctr">
+              <a:lnSpc>
+                <a:spcPct val="140000"/>
+              </a:lnSpc>
+              <a:buNone/>
+              <a:defRPr sz="1500" b="0" i="0">
+                <a:solidFill>
+                  <a:srgbClr val="4C5F75"/>
+                </a:solidFill>
+                <a:latin typeface="Microsoft YaHei"/>
+                <a:ea typeface="Microsoft YaHei"/>
+                <a:cs typeface="Microsoft YaHei"/>
+              </a:defRPr>
+            </a:pPr>
+            <a:r>
+              <a:rPr sz="1500" b="0" i="0">
+                <a:solidFill>
+                  <a:srgbClr val="4C5F75"/>
+                </a:solidFill>
+                <a:latin typeface="Microsoft YaHei"/>
+                <a:ea typeface="Microsoft YaHei"/>
+                <a:cs typeface="Microsoft YaHei"/>
+              </a:rPr>
+              <a:t>稳定、可编辑、可重复。</a:t>
+            </a:r>
+          </a:p>
+        </p:txBody>
+      </p:sp>
+      <p:sp>
+        <p:nvSpPr>
+          <p:cNvPr id="24" name="metric-band">
+            <a:extLst xmlns:a="http://schemas.openxmlformats.org/drawingml/2006/main">
+              <a:ext uri="{FF2B5EF4-FFF2-40B4-BE49-F238E27FC236}">
+                <a16:creationId xmlns:a16="http://schemas.microsoft.com/office/drawing/2014/main" id="{73633432-1228-4484-AE69-DC1B9492433A}"/>
+              </a:ext>
+            </a:extLst>
+          </p:cNvPr>
+          <p:cNvSpPr>
+            <a:spLocks xmlns:a="http://schemas.openxmlformats.org/drawingml/2006/main" noGrp="1"/>
+          </p:cNvSpPr>
+          <p:nvPr/>
+        </p:nvSpPr>
+        <p:spPr>
+          <a:xfrm xmlns:a="http://schemas.openxmlformats.org/drawingml/2006/main" rot="0">
+            <a:off x="1600200" y="4905375"/>
+            <a:ext cx="8991600" cy="952500"/>
+          </a:xfrm>
+          <a:prstGeom xmlns:a="http://schemas.openxmlformats.org/drawingml/2006/main" prst="roundRect">
+            <a:avLst>
+              <a:gd name="adj" fmla="val 18000"/>
+            </a:avLst>
+          </a:prstGeom>
+          <a:solidFill xmlns:a="http://schemas.openxmlformats.org/drawingml/2006/main">
+            <a:srgbClr val="E9F2FC"/>
+          </a:solidFill>
+          <a:ln xmlns:a="http://schemas.openxmlformats.org/drawingml/2006/main" w="9525">
+            <a:solidFill>
+              <a:srgbClr val="C9DCEF"/>
+            </a:solidFill>
+            <a:prstDash val="solid"/>
+          </a:ln>
+        </p:spPr>
+      </p:sp>
+      <p:sp>
+        <p:nvSpPr>
+          <p:cNvPr id="25" name="metric-band-accent">
+            <a:extLst xmlns:a="http://schemas.openxmlformats.org/drawingml/2006/main">
+              <a:ext uri="{FF2B5EF4-FFF2-40B4-BE49-F238E27FC236}">
+                <a16:creationId xmlns:a16="http://schemas.microsoft.com/office/drawing/2014/main" id="{00C6CE76-163A-48EE-98A5-0EB98D8F8017}"/>
+              </a:ext>
+            </a:extLst>
+          </p:cNvPr>
+          <p:cNvSpPr>
+            <a:spLocks xmlns:a="http://schemas.openxmlformats.org/drawingml/2006/main" noGrp="1"/>
+          </p:cNvSpPr>
+          <p:nvPr/>
+        </p:nvSpPr>
+        <p:spPr>
+          <a:xfrm xmlns:a="http://schemas.openxmlformats.org/drawingml/2006/main" rot="0">
+            <a:off x="1600200" y="4905375"/>
+            <a:ext cx="8991600" cy="57150"/>
+          </a:xfrm>
+          <a:prstGeom xmlns:a="http://schemas.openxmlformats.org/drawingml/2006/main" prst="roundRect">
+            <a:avLst>
+              <a:gd name="adj" fmla="val 50000"/>
+            </a:avLst>
+          </a:prstGeom>
+          <a:gradFill xmlns:a="http://schemas.openxmlformats.org/drawingml/2006/main">
+            <a:gsLst>
+              <a:gs pos="0">
+                <a:srgbClr val="3971B7"/>
+              </a:gs>
+              <a:gs pos="100000">
+                <a:srgbClr val="78AEEF"/>
+              </a:gs>
+            </a:gsLst>
+            <a:lin ang="5400000"/>
+          </a:gradFill>
+          <a:ln xmlns:a="http://schemas.openxmlformats.org/drawingml/2006/main" w="0">
+            <a:noFill/>
+            <a:prstDash val="solid"/>
+          </a:ln>
+        </p:spPr>
+      </p:sp>
+      <p:sp>
+        <p:nvSpPr>
+          <p:cNvPr id="26" name="strategy-1-metric-1-value">
+            <a:extLst xmlns:a="http://schemas.openxmlformats.org/drawingml/2006/main">
+              <a:ext uri="{FF2B5EF4-FFF2-40B4-BE49-F238E27FC236}">
+                <a16:creationId xmlns:a16="http://schemas.microsoft.com/office/drawing/2014/main" id="{129AB956-6501-49F9-8332-61042D8BBB14}"/>
+              </a:ext>
+            </a:extLst>
+          </p:cNvPr>
+          <p:cNvSpPr>
+            <a:spLocks xmlns:a="http://schemas.openxmlformats.org/drawingml/2006/main" noGrp="1"/>
+          </p:cNvSpPr>
+          <p:nvPr/>
+        </p:nvSpPr>
+        <p:spPr>
+          <a:xfrm xmlns:a="http://schemas.openxmlformats.org/drawingml/2006/main" rot="0">
+            <a:off x="1762125" y="5109572"/>
+            <a:ext cx="1250899" cy="277416"/>
           </a:xfrm>
           <a:prstGeom xmlns:a="http://schemas.openxmlformats.org/drawingml/2006/main" prst="rect">
             <a:avLst/>
@@ -2527,14 +2411,14 @@
           </a:bodyPr>
           <a:lstStyle xmlns:a="http://schemas.openxmlformats.org/drawingml/2006/main"/>
           <a:p xmlns:a="http://schemas.openxmlformats.org/drawingml/2006/main">
-            <a:pPr algn="ctr">
+            <a:pPr algn="l">
               <a:lnSpc>
-                <a:spcPct val="120000"/>
+                <a:spcPct val="115000"/>
               </a:lnSpc>
               <a:buNone/>
-              <a:defRPr sz="1500" b="0" i="0">
-                <a:solidFill>
-                  <a:srgbClr val="60758D"/>
+              <a:defRPr sz="1900" b="1" i="0">
+                <a:solidFill>
+                  <a:srgbClr val="2F5EA8"/>
                 </a:solidFill>
                 <a:latin typeface="Microsoft YaHei"/>
                 <a:ea typeface="Microsoft YaHei"/>
@@ -2542,68 +2426,37 @@
               </a:defRPr>
             </a:pPr>
             <a:r>
-              <a:rPr sz="1500" b="0" i="0">
-                <a:solidFill>
-                  <a:srgbClr val="60758D"/>
+              <a:rPr sz="1900" b="1" i="0">
+                <a:solidFill>
+                  <a:srgbClr val="2F5EA8"/>
                 </a:solidFill>
                 <a:latin typeface="Microsoft YaHei"/>
                 <a:ea typeface="Microsoft YaHei"/>
                 <a:cs typeface="Microsoft YaHei"/>
               </a:rPr>
-              <a:t>结构化通过率</a:t>
+              <a:t>≥95%</a:t>
             </a:r>
           </a:p>
         </p:txBody>
       </p:sp>
       <p:sp>
         <p:nvSpPr>
-          <p:cNvPr id="28" name="strategy-1-metric-divider">
-            <a:extLst xmlns:a="http://schemas.openxmlformats.org/drawingml/2006/main">
-              <a:ext uri="{FF2B5EF4-FFF2-40B4-BE49-F238E27FC236}">
-                <a16:creationId xmlns:a16="http://schemas.microsoft.com/office/drawing/2014/main" id="{CBE6AE99-005E-4FBF-B320-BC0DA2E5D07F}"/>
-              </a:ext>
-            </a:extLst>
-          </p:cNvPr>
-          <p:cNvSpPr>
-            <a:spLocks xmlns:a="http://schemas.openxmlformats.org/drawingml/2006/main" noGrp="1"/>
-          </p:cNvSpPr>
-          <p:nvPr/>
-        </p:nvSpPr>
-        <p:spPr>
-          <a:xfrm xmlns:a="http://schemas.openxmlformats.org/drawingml/2006/main" rot="0">
-            <a:off x="3136849" y="5124450"/>
-            <a:ext cx="9525" cy="514350"/>
-          </a:xfrm>
-          <a:prstGeom xmlns:a="http://schemas.openxmlformats.org/drawingml/2006/main" prst="rect">
-            <a:avLst/>
-          </a:prstGeom>
-          <a:solidFill xmlns:a="http://schemas.openxmlformats.org/drawingml/2006/main">
-            <a:srgbClr val="C6D8EB"/>
-          </a:solidFill>
-          <a:ln xmlns:a="http://schemas.openxmlformats.org/drawingml/2006/main" w="0">
-            <a:noFill/>
-            <a:prstDash val="solid"/>
-          </a:ln>
-        </p:spPr>
-      </p:sp>
-      <p:sp>
-        <p:nvSpPr>
-          <p:cNvPr id="29" name="strategy-1-metric-2-value">
-            <a:extLst xmlns:a="http://schemas.openxmlformats.org/drawingml/2006/main">
-              <a:ext uri="{FF2B5EF4-FFF2-40B4-BE49-F238E27FC236}">
-                <a16:creationId xmlns:a16="http://schemas.microsoft.com/office/drawing/2014/main" id="{5AD1A5B0-25C0-4EA9-99A1-6840A8B99EAC}"/>
-              </a:ext>
-            </a:extLst>
-          </p:cNvPr>
-          <p:cNvSpPr>
-            <a:spLocks xmlns:a="http://schemas.openxmlformats.org/drawingml/2006/main" noGrp="1"/>
-          </p:cNvSpPr>
-          <p:nvPr/>
-        </p:nvSpPr>
-        <p:spPr>
-          <a:xfrm xmlns:a="http://schemas.openxmlformats.org/drawingml/2006/main" rot="0">
-            <a:off x="3184474" y="5090522"/>
-            <a:ext cx="1250899" cy="277416"/>
+          <p:cNvPr id="27" name="strategy-1-metric-1-label">
+            <a:extLst xmlns:a="http://schemas.openxmlformats.org/drawingml/2006/main">
+              <a:ext uri="{FF2B5EF4-FFF2-40B4-BE49-F238E27FC236}">
+                <a16:creationId xmlns:a16="http://schemas.microsoft.com/office/drawing/2014/main" id="{C0949445-AD4E-4369-B582-72A0578089CE}"/>
+              </a:ext>
+            </a:extLst>
+          </p:cNvPr>
+          <p:cNvSpPr>
+            <a:spLocks xmlns:a="http://schemas.openxmlformats.org/drawingml/2006/main" noGrp="1"/>
+          </p:cNvSpPr>
+          <p:nvPr/>
+        </p:nvSpPr>
+        <p:spPr>
+          <a:xfrm xmlns:a="http://schemas.openxmlformats.org/drawingml/2006/main" rot="0">
+            <a:off x="1762125" y="5425088"/>
+            <a:ext cx="1250899" cy="228600"/>
           </a:xfrm>
           <a:prstGeom xmlns:a="http://schemas.openxmlformats.org/drawingml/2006/main" prst="rect">
             <a:avLst/>
@@ -2620,14 +2473,14 @@
           </a:bodyPr>
           <a:lstStyle xmlns:a="http://schemas.openxmlformats.org/drawingml/2006/main"/>
           <a:p xmlns:a="http://schemas.openxmlformats.org/drawingml/2006/main">
-            <a:pPr algn="ctr">
+            <a:pPr algn="l">
               <a:lnSpc>
-                <a:spcPct val="115000"/>
+                <a:spcPct val="120000"/>
               </a:lnSpc>
               <a:buNone/>
-              <a:defRPr sz="1900" b="1" i="0">
-                <a:solidFill>
-                  <a:srgbClr val="2F5EA8"/>
+              <a:defRPr sz="1500" b="0" i="0">
+                <a:solidFill>
+                  <a:srgbClr val="60758D"/>
                 </a:solidFill>
                 <a:latin typeface="Microsoft YaHei"/>
                 <a:ea typeface="Microsoft YaHei"/>
@@ -2635,37 +2488,68 @@
               </a:defRPr>
             </a:pPr>
             <a:r>
-              <a:rPr sz="1900" b="1" i="0">
-                <a:solidFill>
-                  <a:srgbClr val="2F5EA8"/>
+              <a:rPr sz="1500" b="0" i="0">
+                <a:solidFill>
+                  <a:srgbClr val="60758D"/>
                 </a:solidFill>
                 <a:latin typeface="Microsoft YaHei"/>
                 <a:ea typeface="Microsoft YaHei"/>
                 <a:cs typeface="Microsoft YaHei"/>
               </a:rPr>
-              <a:t>0 项</a:t>
+              <a:t>结构化通过率</a:t>
             </a:r>
           </a:p>
         </p:txBody>
       </p:sp>
       <p:sp>
         <p:nvSpPr>
-          <p:cNvPr id="30" name="strategy-1-metric-2-label">
-            <a:extLst xmlns:a="http://schemas.openxmlformats.org/drawingml/2006/main">
-              <a:ext uri="{FF2B5EF4-FFF2-40B4-BE49-F238E27FC236}">
-                <a16:creationId xmlns:a16="http://schemas.microsoft.com/office/drawing/2014/main" id="{1D692EB5-2A3C-42BA-AD23-FDCC71CDADE8}"/>
-              </a:ext>
-            </a:extLst>
-          </p:cNvPr>
-          <p:cNvSpPr>
-            <a:spLocks xmlns:a="http://schemas.openxmlformats.org/drawingml/2006/main" noGrp="1"/>
-          </p:cNvSpPr>
-          <p:nvPr/>
-        </p:nvSpPr>
-        <p:spPr>
-          <a:xfrm xmlns:a="http://schemas.openxmlformats.org/drawingml/2006/main" rot="0">
-            <a:off x="3184474" y="5415563"/>
-            <a:ext cx="1250899" cy="228600"/>
+          <p:cNvPr id="28" name="strategy-1-metric-divider">
+            <a:extLst xmlns:a="http://schemas.openxmlformats.org/drawingml/2006/main">
+              <a:ext uri="{FF2B5EF4-FFF2-40B4-BE49-F238E27FC236}">
+                <a16:creationId xmlns:a16="http://schemas.microsoft.com/office/drawing/2014/main" id="{DA3757EF-2464-4FFF-8C0C-FC27AC184004}"/>
+              </a:ext>
+            </a:extLst>
+          </p:cNvPr>
+          <p:cNvSpPr>
+            <a:spLocks xmlns:a="http://schemas.openxmlformats.org/drawingml/2006/main" noGrp="1"/>
+          </p:cNvSpPr>
+          <p:nvPr/>
+        </p:nvSpPr>
+        <p:spPr>
+          <a:xfrm xmlns:a="http://schemas.openxmlformats.org/drawingml/2006/main" rot="0">
+            <a:off x="3136849" y="5124450"/>
+            <a:ext cx="9525" cy="514350"/>
+          </a:xfrm>
+          <a:prstGeom xmlns:a="http://schemas.openxmlformats.org/drawingml/2006/main" prst="rect">
+            <a:avLst/>
+          </a:prstGeom>
+          <a:solidFill xmlns:a="http://schemas.openxmlformats.org/drawingml/2006/main">
+            <a:srgbClr val="C6D8EB"/>
+          </a:solidFill>
+          <a:ln xmlns:a="http://schemas.openxmlformats.org/drawingml/2006/main" w="0">
+            <a:noFill/>
+            <a:prstDash val="solid"/>
+          </a:ln>
+        </p:spPr>
+      </p:sp>
+      <p:sp>
+        <p:nvSpPr>
+          <p:cNvPr id="29" name="strategy-1-metric-2-value">
+            <a:extLst xmlns:a="http://schemas.openxmlformats.org/drawingml/2006/main">
+              <a:ext uri="{FF2B5EF4-FFF2-40B4-BE49-F238E27FC236}">
+                <a16:creationId xmlns:a16="http://schemas.microsoft.com/office/drawing/2014/main" id="{B65F36A3-084A-433A-83C7-559F4606AD39}"/>
+              </a:ext>
+            </a:extLst>
+          </p:cNvPr>
+          <p:cNvSpPr>
+            <a:spLocks xmlns:a="http://schemas.openxmlformats.org/drawingml/2006/main" noGrp="1"/>
+          </p:cNvSpPr>
+          <p:nvPr/>
+        </p:nvSpPr>
+        <p:spPr>
+          <a:xfrm xmlns:a="http://schemas.openxmlformats.org/drawingml/2006/main" rot="0">
+            <a:off x="3184474" y="5109572"/>
+            <a:ext cx="1250899" cy="277416"/>
           </a:xfrm>
           <a:prstGeom xmlns:a="http://schemas.openxmlformats.org/drawingml/2006/main" prst="rect">
             <a:avLst/>
@@ -2682,14 +2566,14 @@
           </a:bodyPr>
           <a:lstStyle xmlns:a="http://schemas.openxmlformats.org/drawingml/2006/main"/>
           <a:p xmlns:a="http://schemas.openxmlformats.org/drawingml/2006/main">
-            <a:pPr algn="ctr">
+            <a:pPr algn="l">
               <a:lnSpc>
-                <a:spcPct val="120000"/>
+                <a:spcPct val="115000"/>
               </a:lnSpc>
               <a:buNone/>
-              <a:defRPr sz="1500" b="0" i="0">
-                <a:solidFill>
-                  <a:srgbClr val="60758D"/>
+              <a:defRPr sz="1900" b="1" i="0">
+                <a:solidFill>
+                  <a:srgbClr val="2F5EA8"/>
                 </a:solidFill>
                 <a:latin typeface="Microsoft YaHei"/>
                 <a:ea typeface="Microsoft YaHei"/>
@@ -2697,68 +2581,37 @@
               </a:defRPr>
             </a:pPr>
             <a:r>
-              <a:rPr sz="1500" b="0" i="0">
-                <a:solidFill>
-                  <a:srgbClr val="60758D"/>
+              <a:rPr sz="1900" b="1" i="0">
+                <a:solidFill>
+                  <a:srgbClr val="2F5EA8"/>
                 </a:solidFill>
                 <a:latin typeface="Microsoft YaHei"/>
                 <a:ea typeface="Microsoft YaHei"/>
                 <a:cs typeface="Microsoft YaHei"/>
               </a:rPr>
-              <a:t>信息遗漏</a:t>
+              <a:t>0 项</a:t>
             </a:r>
           </a:p>
         </p:txBody>
       </p:sp>
       <p:sp>
         <p:nvSpPr>
-          <p:cNvPr id="31" name="strategy-2-foundation-divider">
-            <a:extLst xmlns:a="http://schemas.openxmlformats.org/drawingml/2006/main">
-              <a:ext uri="{FF2B5EF4-FFF2-40B4-BE49-F238E27FC236}">
-                <a16:creationId xmlns:a16="http://schemas.microsoft.com/office/drawing/2014/main" id="{7AFDEA46-8EA8-4E5E-A9D4-5D0D4F98FE0A}"/>
-              </a:ext>
-            </a:extLst>
-          </p:cNvPr>
-          <p:cNvSpPr>
-            <a:spLocks xmlns:a="http://schemas.openxmlformats.org/drawingml/2006/main" noGrp="1"/>
-          </p:cNvSpPr>
-          <p:nvPr/>
-        </p:nvSpPr>
-        <p:spPr>
-          <a:xfrm xmlns:a="http://schemas.openxmlformats.org/drawingml/2006/main" rot="0">
-            <a:off x="4597298" y="5076825"/>
-            <a:ext cx="9525" cy="609600"/>
-          </a:xfrm>
-          <a:prstGeom xmlns:a="http://schemas.openxmlformats.org/drawingml/2006/main" prst="rect">
-            <a:avLst/>
-          </a:prstGeom>
-          <a:solidFill xmlns:a="http://schemas.openxmlformats.org/drawingml/2006/main">
-            <a:srgbClr val="BFD3E9"/>
-          </a:solidFill>
-          <a:ln xmlns:a="http://schemas.openxmlformats.org/drawingml/2006/main" w="0">
-            <a:noFill/>
-            <a:prstDash val="solid"/>
-          </a:ln>
-        </p:spPr>
-      </p:sp>
-      <p:sp>
-        <p:nvSpPr>
-          <p:cNvPr id="32" name="strategy-2-metric-1-value">
-            <a:extLst xmlns:a="http://schemas.openxmlformats.org/drawingml/2006/main">
-              <a:ext uri="{FF2B5EF4-FFF2-40B4-BE49-F238E27FC236}">
-                <a16:creationId xmlns:a16="http://schemas.microsoft.com/office/drawing/2014/main" id="{E07D97A8-9A4D-4D0A-8004-D390946AF196}"/>
-              </a:ext>
-            </a:extLst>
-          </p:cNvPr>
-          <p:cNvSpPr>
-            <a:spLocks xmlns:a="http://schemas.openxmlformats.org/drawingml/2006/main" noGrp="1"/>
-          </p:cNvSpPr>
-          <p:nvPr/>
-        </p:nvSpPr>
-        <p:spPr>
-          <a:xfrm xmlns:a="http://schemas.openxmlformats.org/drawingml/2006/main" rot="0">
-            <a:off x="4759223" y="5090522"/>
-            <a:ext cx="1250899" cy="277416"/>
+          <p:cNvPr id="30" name="strategy-1-metric-2-label">
+            <a:extLst xmlns:a="http://schemas.openxmlformats.org/drawingml/2006/main">
+              <a:ext uri="{FF2B5EF4-FFF2-40B4-BE49-F238E27FC236}">
+                <a16:creationId xmlns:a16="http://schemas.microsoft.com/office/drawing/2014/main" id="{E21A640D-978C-4539-AE14-45340A8FC1D6}"/>
+              </a:ext>
+            </a:extLst>
+          </p:cNvPr>
+          <p:cNvSpPr>
+            <a:spLocks xmlns:a="http://schemas.openxmlformats.org/drawingml/2006/main" noGrp="1"/>
+          </p:cNvSpPr>
+          <p:nvPr/>
+        </p:nvSpPr>
+        <p:spPr>
+          <a:xfrm xmlns:a="http://schemas.openxmlformats.org/drawingml/2006/main" rot="0">
+            <a:off x="3184474" y="5425088"/>
+            <a:ext cx="1250899" cy="228600"/>
           </a:xfrm>
           <a:prstGeom xmlns:a="http://schemas.openxmlformats.org/drawingml/2006/main" prst="rect">
             <a:avLst/>
@@ -2775,14 +2628,14 @@
           </a:bodyPr>
           <a:lstStyle xmlns:a="http://schemas.openxmlformats.org/drawingml/2006/main"/>
           <a:p xmlns:a="http://schemas.openxmlformats.org/drawingml/2006/main">
-            <a:pPr algn="ctr">
+            <a:pPr algn="l">
               <a:lnSpc>
-                <a:spcPct val="115000"/>
+                <a:spcPct val="120000"/>
               </a:lnSpc>
               <a:buNone/>
-              <a:defRPr sz="1900" b="1" i="0">
-                <a:solidFill>
-                  <a:srgbClr val="2F5EA8"/>
+              <a:defRPr sz="1500" b="0" i="0">
+                <a:solidFill>
+                  <a:srgbClr val="60758D"/>
                 </a:solidFill>
                 <a:latin typeface="Microsoft YaHei"/>
                 <a:ea typeface="Microsoft YaHei"/>
@@ -2790,37 +2643,68 @@
               </a:defRPr>
             </a:pPr>
             <a:r>
-              <a:rPr sz="1900" b="1" i="0">
-                <a:solidFill>
-                  <a:srgbClr val="2F5EA8"/>
+              <a:rPr sz="1500" b="0" i="0">
+                <a:solidFill>
+                  <a:srgbClr val="60758D"/>
                 </a:solidFill>
                 <a:latin typeface="Microsoft YaHei"/>
                 <a:ea typeface="Microsoft YaHei"/>
                 <a:cs typeface="Microsoft YaHei"/>
               </a:rPr>
-              <a:t>≥80%</a:t>
+              <a:t>信息遗漏</a:t>
             </a:r>
           </a:p>
         </p:txBody>
       </p:sp>
       <p:sp>
         <p:nvSpPr>
-          <p:cNvPr id="33" name="strategy-2-metric-1-label">
-            <a:extLst xmlns:a="http://schemas.openxmlformats.org/drawingml/2006/main">
-              <a:ext uri="{FF2B5EF4-FFF2-40B4-BE49-F238E27FC236}">
-                <a16:creationId xmlns:a16="http://schemas.microsoft.com/office/drawing/2014/main" id="{F1C9E4C1-47AD-45C7-A3D9-112461E70400}"/>
-              </a:ext>
-            </a:extLst>
-          </p:cNvPr>
-          <p:cNvSpPr>
-            <a:spLocks xmlns:a="http://schemas.openxmlformats.org/drawingml/2006/main" noGrp="1"/>
-          </p:cNvSpPr>
-          <p:nvPr/>
-        </p:nvSpPr>
-        <p:spPr>
-          <a:xfrm xmlns:a="http://schemas.openxmlformats.org/drawingml/2006/main" rot="0">
-            <a:off x="4759223" y="5415563"/>
-            <a:ext cx="1250899" cy="228600"/>
+          <p:cNvPr id="31" name="strategy-2-foundation-divider">
+            <a:extLst xmlns:a="http://schemas.openxmlformats.org/drawingml/2006/main">
+              <a:ext uri="{FF2B5EF4-FFF2-40B4-BE49-F238E27FC236}">
+                <a16:creationId xmlns:a16="http://schemas.microsoft.com/office/drawing/2014/main" id="{A1224AB2-E8C6-4442-8A1B-B94CEA234874}"/>
+              </a:ext>
+            </a:extLst>
+          </p:cNvPr>
+          <p:cNvSpPr>
+            <a:spLocks xmlns:a="http://schemas.openxmlformats.org/drawingml/2006/main" noGrp="1"/>
+          </p:cNvSpPr>
+          <p:nvPr/>
+        </p:nvSpPr>
+        <p:spPr>
+          <a:xfrm xmlns:a="http://schemas.openxmlformats.org/drawingml/2006/main" rot="0">
+            <a:off x="4597298" y="5076825"/>
+            <a:ext cx="9525" cy="609600"/>
+          </a:xfrm>
+          <a:prstGeom xmlns:a="http://schemas.openxmlformats.org/drawingml/2006/main" prst="rect">
+            <a:avLst/>
+          </a:prstGeom>
+          <a:solidFill xmlns:a="http://schemas.openxmlformats.org/drawingml/2006/main">
+            <a:srgbClr val="BFD3E9"/>
+          </a:solidFill>
+          <a:ln xmlns:a="http://schemas.openxmlformats.org/drawingml/2006/main" w="0">
+            <a:noFill/>
+            <a:prstDash val="solid"/>
+          </a:ln>
+        </p:spPr>
+      </p:sp>
+      <p:sp>
+        <p:nvSpPr>
+          <p:cNvPr id="32" name="strategy-2-metric-1-value">
+            <a:extLst xmlns:a="http://schemas.openxmlformats.org/drawingml/2006/main">
+              <a:ext uri="{FF2B5EF4-FFF2-40B4-BE49-F238E27FC236}">
+                <a16:creationId xmlns:a16="http://schemas.microsoft.com/office/drawing/2014/main" id="{883E0D72-7C2E-4FD4-AD37-119C81534709}"/>
+              </a:ext>
+            </a:extLst>
+          </p:cNvPr>
+          <p:cNvSpPr>
+            <a:spLocks xmlns:a="http://schemas.openxmlformats.org/drawingml/2006/main" noGrp="1"/>
+          </p:cNvSpPr>
+          <p:nvPr/>
+        </p:nvSpPr>
+        <p:spPr>
+          <a:xfrm xmlns:a="http://schemas.openxmlformats.org/drawingml/2006/main" rot="0">
+            <a:off x="4759223" y="5109572"/>
+            <a:ext cx="1250899" cy="277416"/>
           </a:xfrm>
           <a:prstGeom xmlns:a="http://schemas.openxmlformats.org/drawingml/2006/main" prst="rect">
             <a:avLst/>
@@ -2837,14 +2721,14 @@
           </a:bodyPr>
           <a:lstStyle xmlns:a="http://schemas.openxmlformats.org/drawingml/2006/main"/>
           <a:p xmlns:a="http://schemas.openxmlformats.org/drawingml/2006/main">
-            <a:pPr algn="ctr">
+            <a:pPr algn="l">
               <a:lnSpc>
-                <a:spcPct val="120000"/>
+                <a:spcPct val="115000"/>
               </a:lnSpc>
               <a:buNone/>
-              <a:defRPr sz="1500" b="0" i="0">
-                <a:solidFill>
-                  <a:srgbClr val="60758D"/>
+              <a:defRPr sz="1900" b="1" i="0">
+                <a:solidFill>
+                  <a:srgbClr val="2F5EA8"/>
                 </a:solidFill>
                 <a:latin typeface="Microsoft YaHei"/>
                 <a:ea typeface="Microsoft YaHei"/>
@@ -2852,68 +2736,37 @@
               </a:defRPr>
             </a:pPr>
             <a:r>
-              <a:rPr sz="1500" b="0" i="0">
-                <a:solidFill>
-                  <a:srgbClr val="60758D"/>
+              <a:rPr sz="1900" b="1" i="0">
+                <a:solidFill>
+                  <a:srgbClr val="2F5EA8"/>
                 </a:solidFill>
                 <a:latin typeface="Microsoft YaHei"/>
                 <a:ea typeface="Microsoft YaHei"/>
                 <a:cs typeface="Microsoft YaHei"/>
               </a:rPr>
-              <a:t>核心逻辑覆盖</a:t>
+              <a:t>≥80%</a:t>
             </a:r>
           </a:p>
         </p:txBody>
       </p:sp>
       <p:sp>
         <p:nvSpPr>
-          <p:cNvPr id="34" name="strategy-2-metric-divider">
-            <a:extLst xmlns:a="http://schemas.openxmlformats.org/drawingml/2006/main">
-              <a:ext uri="{FF2B5EF4-FFF2-40B4-BE49-F238E27FC236}">
-                <a16:creationId xmlns:a16="http://schemas.microsoft.com/office/drawing/2014/main" id="{27781A24-F466-40A0-BAA4-A1083506FB6B}"/>
-              </a:ext>
-            </a:extLst>
-          </p:cNvPr>
-          <p:cNvSpPr>
-            <a:spLocks xmlns:a="http://schemas.openxmlformats.org/drawingml/2006/main" noGrp="1"/>
-          </p:cNvSpPr>
-          <p:nvPr/>
-        </p:nvSpPr>
-        <p:spPr>
-          <a:xfrm xmlns:a="http://schemas.openxmlformats.org/drawingml/2006/main" rot="0">
-            <a:off x="6133948" y="5124450"/>
-            <a:ext cx="9525" cy="514350"/>
-          </a:xfrm>
-          <a:prstGeom xmlns:a="http://schemas.openxmlformats.org/drawingml/2006/main" prst="rect">
-            <a:avLst/>
-          </a:prstGeom>
-          <a:solidFill xmlns:a="http://schemas.openxmlformats.org/drawingml/2006/main">
-            <a:srgbClr val="C6D8EB"/>
-          </a:solidFill>
-          <a:ln xmlns:a="http://schemas.openxmlformats.org/drawingml/2006/main" w="0">
-            <a:noFill/>
-            <a:prstDash val="solid"/>
-          </a:ln>
-        </p:spPr>
-      </p:sp>
-      <p:sp>
-        <p:nvSpPr>
-          <p:cNvPr id="35" name="strategy-2-metric-2-value">
-            <a:extLst xmlns:a="http://schemas.openxmlformats.org/drawingml/2006/main">
-              <a:ext uri="{FF2B5EF4-FFF2-40B4-BE49-F238E27FC236}">
-                <a16:creationId xmlns:a16="http://schemas.microsoft.com/office/drawing/2014/main" id="{544618B0-531E-4D1D-8FD1-BA13F60BED5E}"/>
-              </a:ext>
-            </a:extLst>
-          </p:cNvPr>
-          <p:cNvSpPr>
-            <a:spLocks xmlns:a="http://schemas.openxmlformats.org/drawingml/2006/main" noGrp="1"/>
-          </p:cNvSpPr>
-          <p:nvPr/>
-        </p:nvSpPr>
-        <p:spPr>
-          <a:xfrm xmlns:a="http://schemas.openxmlformats.org/drawingml/2006/main" rot="0">
-            <a:off x="6181573" y="5090522"/>
-            <a:ext cx="1251052" cy="277416"/>
+          <p:cNvPr id="33" name="strategy-2-metric-1-label">
+            <a:extLst xmlns:a="http://schemas.openxmlformats.org/drawingml/2006/main">
+              <a:ext uri="{FF2B5EF4-FFF2-40B4-BE49-F238E27FC236}">
+                <a16:creationId xmlns:a16="http://schemas.microsoft.com/office/drawing/2014/main" id="{9AB656EC-8109-48F3-AA4A-A09007B5CE24}"/>
+              </a:ext>
+            </a:extLst>
+          </p:cNvPr>
+          <p:cNvSpPr>
+            <a:spLocks xmlns:a="http://schemas.openxmlformats.org/drawingml/2006/main" noGrp="1"/>
+          </p:cNvSpPr>
+          <p:nvPr/>
+        </p:nvSpPr>
+        <p:spPr>
+          <a:xfrm xmlns:a="http://schemas.openxmlformats.org/drawingml/2006/main" rot="0">
+            <a:off x="4759223" y="5425088"/>
+            <a:ext cx="1250899" cy="228600"/>
           </a:xfrm>
           <a:prstGeom xmlns:a="http://schemas.openxmlformats.org/drawingml/2006/main" prst="rect">
             <a:avLst/>
@@ -2930,14 +2783,14 @@
           </a:bodyPr>
           <a:lstStyle xmlns:a="http://schemas.openxmlformats.org/drawingml/2006/main"/>
           <a:p xmlns:a="http://schemas.openxmlformats.org/drawingml/2006/main">
-            <a:pPr algn="ctr">
+            <a:pPr algn="l">
               <a:lnSpc>
-                <a:spcPct val="115000"/>
+                <a:spcPct val="120000"/>
               </a:lnSpc>
               <a:buNone/>
-              <a:defRPr sz="1900" b="1" i="0">
-                <a:solidFill>
-                  <a:srgbClr val="2F5EA8"/>
+              <a:defRPr sz="1500" b="0" i="0">
+                <a:solidFill>
+                  <a:srgbClr val="60758D"/>
                 </a:solidFill>
                 <a:latin typeface="Microsoft YaHei"/>
                 <a:ea typeface="Microsoft YaHei"/>
@@ -2945,37 +2798,68 @@
               </a:defRPr>
             </a:pPr>
             <a:r>
-              <a:rPr sz="1900" b="1" i="0">
-                <a:solidFill>
-                  <a:srgbClr val="2F5EA8"/>
+              <a:rPr sz="1500" b="0" i="0">
+                <a:solidFill>
+                  <a:srgbClr val="60758D"/>
                 </a:solidFill>
                 <a:latin typeface="Microsoft YaHei"/>
                 <a:ea typeface="Microsoft YaHei"/>
                 <a:cs typeface="Microsoft YaHei"/>
               </a:rPr>
-              <a:t>≤1 轮</a:t>
+              <a:t>核心逻辑覆盖</a:t>
             </a:r>
           </a:p>
         </p:txBody>
       </p:sp>
       <p:sp>
         <p:nvSpPr>
-          <p:cNvPr id="36" name="strategy-2-metric-2-label">
-            <a:extLst xmlns:a="http://schemas.openxmlformats.org/drawingml/2006/main">
-              <a:ext uri="{FF2B5EF4-FFF2-40B4-BE49-F238E27FC236}">
-                <a16:creationId xmlns:a16="http://schemas.microsoft.com/office/drawing/2014/main" id="{65AF8247-67CF-43D6-95E6-3498B0297B66}"/>
-              </a:ext>
-            </a:extLst>
-          </p:cNvPr>
-          <p:cNvSpPr>
-            <a:spLocks xmlns:a="http://schemas.openxmlformats.org/drawingml/2006/main" noGrp="1"/>
-          </p:cNvSpPr>
-          <p:nvPr/>
-        </p:nvSpPr>
-        <p:spPr>
-          <a:xfrm xmlns:a="http://schemas.openxmlformats.org/drawingml/2006/main" rot="0">
-            <a:off x="6181573" y="5415563"/>
-            <a:ext cx="1251052" cy="228600"/>
+          <p:cNvPr id="34" name="strategy-2-metric-divider">
+            <a:extLst xmlns:a="http://schemas.openxmlformats.org/drawingml/2006/main">
+              <a:ext uri="{FF2B5EF4-FFF2-40B4-BE49-F238E27FC236}">
+                <a16:creationId xmlns:a16="http://schemas.microsoft.com/office/drawing/2014/main" id="{D9051486-0656-47CE-9DDF-F10DD944ECDE}"/>
+              </a:ext>
+            </a:extLst>
+          </p:cNvPr>
+          <p:cNvSpPr>
+            <a:spLocks xmlns:a="http://schemas.openxmlformats.org/drawingml/2006/main" noGrp="1"/>
+          </p:cNvSpPr>
+          <p:nvPr/>
+        </p:nvSpPr>
+        <p:spPr>
+          <a:xfrm xmlns:a="http://schemas.openxmlformats.org/drawingml/2006/main" rot="0">
+            <a:off x="6133948" y="5124450"/>
+            <a:ext cx="9525" cy="514350"/>
+          </a:xfrm>
+          <a:prstGeom xmlns:a="http://schemas.openxmlformats.org/drawingml/2006/main" prst="rect">
+            <a:avLst/>
+          </a:prstGeom>
+          <a:solidFill xmlns:a="http://schemas.openxmlformats.org/drawingml/2006/main">
+            <a:srgbClr val="C6D8EB"/>
+          </a:solidFill>
+          <a:ln xmlns:a="http://schemas.openxmlformats.org/drawingml/2006/main" w="0">
+            <a:noFill/>
+            <a:prstDash val="solid"/>
+          </a:ln>
+        </p:spPr>
+      </p:sp>
+      <p:sp>
+        <p:nvSpPr>
+          <p:cNvPr id="35" name="strategy-2-metric-2-value">
+            <a:extLst xmlns:a="http://schemas.openxmlformats.org/drawingml/2006/main">
+              <a:ext uri="{FF2B5EF4-FFF2-40B4-BE49-F238E27FC236}">
+                <a16:creationId xmlns:a16="http://schemas.microsoft.com/office/drawing/2014/main" id="{C474B67A-0A26-4B1C-93CA-A74AA97B5577}"/>
+              </a:ext>
+            </a:extLst>
+          </p:cNvPr>
+          <p:cNvSpPr>
+            <a:spLocks xmlns:a="http://schemas.openxmlformats.org/drawingml/2006/main" noGrp="1"/>
+          </p:cNvSpPr>
+          <p:nvPr/>
+        </p:nvSpPr>
+        <p:spPr>
+          <a:xfrm xmlns:a="http://schemas.openxmlformats.org/drawingml/2006/main" rot="0">
+            <a:off x="6181573" y="5109572"/>
+            <a:ext cx="1251052" cy="277416"/>
           </a:xfrm>
           <a:prstGeom xmlns:a="http://schemas.openxmlformats.org/drawingml/2006/main" prst="rect">
             <a:avLst/>
@@ -2992,14 +2876,14 @@
           </a:bodyPr>
           <a:lstStyle xmlns:a="http://schemas.openxmlformats.org/drawingml/2006/main"/>
           <a:p xmlns:a="http://schemas.openxmlformats.org/drawingml/2006/main">
-            <a:pPr algn="ctr">
+            <a:pPr algn="l">
               <a:lnSpc>
-                <a:spcPct val="120000"/>
+                <a:spcPct val="115000"/>
               </a:lnSpc>
               <a:buNone/>
-              <a:defRPr sz="1500" b="0" i="0">
-                <a:solidFill>
-                  <a:srgbClr val="60758D"/>
+              <a:defRPr sz="1900" b="1" i="0">
+                <a:solidFill>
+                  <a:srgbClr val="2F5EA8"/>
                 </a:solidFill>
                 <a:latin typeface="Microsoft YaHei"/>
                 <a:ea typeface="Microsoft YaHei"/>
@@ -3007,68 +2891,37 @@
               </a:defRPr>
             </a:pPr>
             <a:r>
-              <a:rPr sz="1500" b="0" i="0">
-                <a:solidFill>
-                  <a:srgbClr val="60758D"/>
+              <a:rPr sz="1900" b="1" i="0">
+                <a:solidFill>
+                  <a:srgbClr val="2F5EA8"/>
                 </a:solidFill>
                 <a:latin typeface="Microsoft YaHei"/>
                 <a:ea typeface="Microsoft YaHei"/>
                 <a:cs typeface="Microsoft YaHei"/>
               </a:rPr>
-              <a:t>人工返修</a:t>
+              <a:t>≤1 轮</a:t>
             </a:r>
           </a:p>
         </p:txBody>
       </p:sp>
       <p:sp>
         <p:nvSpPr>
-          <p:cNvPr id="37" name="strategy-3-foundation-divider">
-            <a:extLst xmlns:a="http://schemas.openxmlformats.org/drawingml/2006/main">
-              <a:ext uri="{FF2B5EF4-FFF2-40B4-BE49-F238E27FC236}">
-                <a16:creationId xmlns:a16="http://schemas.microsoft.com/office/drawing/2014/main" id="{7B69D39C-A654-4D40-98C7-44FBF77616C6}"/>
-              </a:ext>
-            </a:extLst>
-          </p:cNvPr>
-          <p:cNvSpPr>
-            <a:spLocks xmlns:a="http://schemas.openxmlformats.org/drawingml/2006/main" noGrp="1"/>
-          </p:cNvSpPr>
-          <p:nvPr/>
-        </p:nvSpPr>
-        <p:spPr>
-          <a:xfrm xmlns:a="http://schemas.openxmlformats.org/drawingml/2006/main" rot="0">
-            <a:off x="7594549" y="5076825"/>
-            <a:ext cx="9525" cy="609600"/>
-          </a:xfrm>
-          <a:prstGeom xmlns:a="http://schemas.openxmlformats.org/drawingml/2006/main" prst="rect">
-            <a:avLst/>
-          </a:prstGeom>
-          <a:solidFill xmlns:a="http://schemas.openxmlformats.org/drawingml/2006/main">
-            <a:srgbClr val="BFD3E9"/>
-          </a:solidFill>
-          <a:ln xmlns:a="http://schemas.openxmlformats.org/drawingml/2006/main" w="0">
-            <a:noFill/>
-            <a:prstDash val="solid"/>
-          </a:ln>
-        </p:spPr>
-      </p:sp>
-      <p:sp>
-        <p:nvSpPr>
-          <p:cNvPr id="38" name="strategy-3-metric-1-value">
-            <a:extLst xmlns:a="http://schemas.openxmlformats.org/drawingml/2006/main">
-              <a:ext uri="{FF2B5EF4-FFF2-40B4-BE49-F238E27FC236}">
-                <a16:creationId xmlns:a16="http://schemas.microsoft.com/office/drawing/2014/main" id="{2AB794AF-A44F-49ED-B3D6-82689041A56A}"/>
-              </a:ext>
-            </a:extLst>
-          </p:cNvPr>
-          <p:cNvSpPr>
-            <a:spLocks xmlns:a="http://schemas.openxmlformats.org/drawingml/2006/main" noGrp="1"/>
-          </p:cNvSpPr>
-          <p:nvPr/>
-        </p:nvSpPr>
-        <p:spPr>
-          <a:xfrm xmlns:a="http://schemas.openxmlformats.org/drawingml/2006/main" rot="0">
-            <a:off x="7756474" y="5090522"/>
-            <a:ext cx="1250899" cy="277416"/>
+          <p:cNvPr id="36" name="strategy-2-metric-2-label">
+            <a:extLst xmlns:a="http://schemas.openxmlformats.org/drawingml/2006/main">
+              <a:ext uri="{FF2B5EF4-FFF2-40B4-BE49-F238E27FC236}">
+                <a16:creationId xmlns:a16="http://schemas.microsoft.com/office/drawing/2014/main" id="{2E9E6E86-D6FB-4209-AD45-708D8E008948}"/>
+              </a:ext>
+            </a:extLst>
+          </p:cNvPr>
+          <p:cNvSpPr>
+            <a:spLocks xmlns:a="http://schemas.openxmlformats.org/drawingml/2006/main" noGrp="1"/>
+          </p:cNvSpPr>
+          <p:nvPr/>
+        </p:nvSpPr>
+        <p:spPr>
+          <a:xfrm xmlns:a="http://schemas.openxmlformats.org/drawingml/2006/main" rot="0">
+            <a:off x="6181573" y="5425088"/>
+            <a:ext cx="1251052" cy="228600"/>
           </a:xfrm>
           <a:prstGeom xmlns:a="http://schemas.openxmlformats.org/drawingml/2006/main" prst="rect">
             <a:avLst/>
@@ -3085,14 +2938,14 @@
           </a:bodyPr>
           <a:lstStyle xmlns:a="http://schemas.openxmlformats.org/drawingml/2006/main"/>
           <a:p xmlns:a="http://schemas.openxmlformats.org/drawingml/2006/main">
-            <a:pPr algn="ctr">
+            <a:pPr algn="l">
               <a:lnSpc>
-                <a:spcPct val="115000"/>
+                <a:spcPct val="120000"/>
               </a:lnSpc>
               <a:buNone/>
-              <a:defRPr sz="1900" b="1" i="0">
-                <a:solidFill>
-                  <a:srgbClr val="2F5EA8"/>
+              <a:defRPr sz="1500" b="0" i="0">
+                <a:solidFill>
+                  <a:srgbClr val="60758D"/>
                 </a:solidFill>
                 <a:latin typeface="Microsoft YaHei"/>
                 <a:ea typeface="Microsoft YaHei"/>
@@ -3100,37 +2953,68 @@
               </a:defRPr>
             </a:pPr>
             <a:r>
-              <a:rPr sz="1900" b="1" i="0">
-                <a:solidFill>
-                  <a:srgbClr val="2F5EA8"/>
+              <a:rPr sz="1500" b="0" i="0">
+                <a:solidFill>
+                  <a:srgbClr val="60758D"/>
                 </a:solidFill>
                 <a:latin typeface="Microsoft YaHei"/>
                 <a:ea typeface="Microsoft YaHei"/>
                 <a:cs typeface="Microsoft YaHei"/>
               </a:rPr>
-              <a:t>10分钟</a:t>
+              <a:t>人工返修</a:t>
             </a:r>
           </a:p>
         </p:txBody>
       </p:sp>
       <p:sp>
         <p:nvSpPr>
-          <p:cNvPr id="39" name="strategy-3-metric-1-label">
-            <a:extLst xmlns:a="http://schemas.openxmlformats.org/drawingml/2006/main">
-              <a:ext uri="{FF2B5EF4-FFF2-40B4-BE49-F238E27FC236}">
-                <a16:creationId xmlns:a16="http://schemas.microsoft.com/office/drawing/2014/main" id="{7784C923-D94D-48D0-97C5-4B7BF5379208}"/>
-              </a:ext>
-            </a:extLst>
-          </p:cNvPr>
-          <p:cNvSpPr>
-            <a:spLocks xmlns:a="http://schemas.openxmlformats.org/drawingml/2006/main" noGrp="1"/>
-          </p:cNvSpPr>
-          <p:nvPr/>
-        </p:nvSpPr>
-        <p:spPr>
-          <a:xfrm xmlns:a="http://schemas.openxmlformats.org/drawingml/2006/main" rot="0">
-            <a:off x="7756474" y="5415563"/>
-            <a:ext cx="1250899" cy="228600"/>
+          <p:cNvPr id="37" name="strategy-3-foundation-divider">
+            <a:extLst xmlns:a="http://schemas.openxmlformats.org/drawingml/2006/main">
+              <a:ext uri="{FF2B5EF4-FFF2-40B4-BE49-F238E27FC236}">
+                <a16:creationId xmlns:a16="http://schemas.microsoft.com/office/drawing/2014/main" id="{821D8F58-1703-4B03-AC42-F7193DEDC9DC}"/>
+              </a:ext>
+            </a:extLst>
+          </p:cNvPr>
+          <p:cNvSpPr>
+            <a:spLocks xmlns:a="http://schemas.openxmlformats.org/drawingml/2006/main" noGrp="1"/>
+          </p:cNvSpPr>
+          <p:nvPr/>
+        </p:nvSpPr>
+        <p:spPr>
+          <a:xfrm xmlns:a="http://schemas.openxmlformats.org/drawingml/2006/main" rot="0">
+            <a:off x="7594549" y="5076825"/>
+            <a:ext cx="9525" cy="609600"/>
+          </a:xfrm>
+          <a:prstGeom xmlns:a="http://schemas.openxmlformats.org/drawingml/2006/main" prst="rect">
+            <a:avLst/>
+          </a:prstGeom>
+          <a:solidFill xmlns:a="http://schemas.openxmlformats.org/drawingml/2006/main">
+            <a:srgbClr val="BFD3E9"/>
+          </a:solidFill>
+          <a:ln xmlns:a="http://schemas.openxmlformats.org/drawingml/2006/main" w="0">
+            <a:noFill/>
+            <a:prstDash val="solid"/>
+          </a:ln>
+        </p:spPr>
+      </p:sp>
+      <p:sp>
+        <p:nvSpPr>
+          <p:cNvPr id="38" name="strategy-3-metric-1-value">
+            <a:extLst xmlns:a="http://schemas.openxmlformats.org/drawingml/2006/main">
+              <a:ext uri="{FF2B5EF4-FFF2-40B4-BE49-F238E27FC236}">
+                <a16:creationId xmlns:a16="http://schemas.microsoft.com/office/drawing/2014/main" id="{6F6D1A18-A691-4C8B-896E-A8A48EECC95E}"/>
+              </a:ext>
+            </a:extLst>
+          </p:cNvPr>
+          <p:cNvSpPr>
+            <a:spLocks xmlns:a="http://schemas.openxmlformats.org/drawingml/2006/main" noGrp="1"/>
+          </p:cNvSpPr>
+          <p:nvPr/>
+        </p:nvSpPr>
+        <p:spPr>
+          <a:xfrm xmlns:a="http://schemas.openxmlformats.org/drawingml/2006/main" rot="0">
+            <a:off x="7756474" y="5109572"/>
+            <a:ext cx="1250899" cy="277416"/>
           </a:xfrm>
           <a:prstGeom xmlns:a="http://schemas.openxmlformats.org/drawingml/2006/main" prst="rect">
             <a:avLst/>
@@ -3147,14 +3031,14 @@
           </a:bodyPr>
           <a:lstStyle xmlns:a="http://schemas.openxmlformats.org/drawingml/2006/main"/>
           <a:p xmlns:a="http://schemas.openxmlformats.org/drawingml/2006/main">
-            <a:pPr algn="ctr">
+            <a:pPr algn="l">
               <a:lnSpc>
-                <a:spcPct val="120000"/>
+                <a:spcPct val="115000"/>
               </a:lnSpc>
               <a:buNone/>
-              <a:defRPr sz="1500" b="0" i="0">
-                <a:solidFill>
-                  <a:srgbClr val="60758D"/>
+              <a:defRPr sz="1900" b="1" i="0">
+                <a:solidFill>
+                  <a:srgbClr val="2F5EA8"/>
                 </a:solidFill>
                 <a:latin typeface="Microsoft YaHei"/>
                 <a:ea typeface="Microsoft YaHei"/>
@@ -3162,68 +3046,37 @@
               </a:defRPr>
             </a:pPr>
             <a:r>
-              <a:rPr sz="1500" b="0" i="0">
-                <a:solidFill>
-                  <a:srgbClr val="60758D"/>
+              <a:rPr sz="1900" b="1" i="0">
+                <a:solidFill>
+                  <a:srgbClr val="2F5EA8"/>
                 </a:solidFill>
                 <a:latin typeface="Microsoft YaHei"/>
                 <a:ea typeface="Microsoft YaHei"/>
                 <a:cs typeface="Microsoft YaHei"/>
               </a:rPr>
-              <a:t>单稿生成</a:t>
+              <a:t>10分钟</a:t>
             </a:r>
           </a:p>
         </p:txBody>
       </p:sp>
       <p:sp>
         <p:nvSpPr>
-          <p:cNvPr id="40" name="strategy-3-metric-divider">
-            <a:extLst xmlns:a="http://schemas.openxmlformats.org/drawingml/2006/main">
-              <a:ext uri="{FF2B5EF4-FFF2-40B4-BE49-F238E27FC236}">
-                <a16:creationId xmlns:a16="http://schemas.microsoft.com/office/drawing/2014/main" id="{2DDD3681-0E1C-4C5E-8132-6C15922B58E1}"/>
-              </a:ext>
-            </a:extLst>
-          </p:cNvPr>
-          <p:cNvSpPr>
-            <a:spLocks xmlns:a="http://schemas.openxmlformats.org/drawingml/2006/main" noGrp="1"/>
-          </p:cNvSpPr>
-          <p:nvPr/>
-        </p:nvSpPr>
-        <p:spPr>
-          <a:xfrm xmlns:a="http://schemas.openxmlformats.org/drawingml/2006/main" rot="0">
-            <a:off x="9131198" y="5124450"/>
-            <a:ext cx="9525" cy="514350"/>
-          </a:xfrm>
-          <a:prstGeom xmlns:a="http://schemas.openxmlformats.org/drawingml/2006/main" prst="rect">
-            <a:avLst/>
-          </a:prstGeom>
-          <a:solidFill xmlns:a="http://schemas.openxmlformats.org/drawingml/2006/main">
-            <a:srgbClr val="C6D8EB"/>
-          </a:solidFill>
-          <a:ln xmlns:a="http://schemas.openxmlformats.org/drawingml/2006/main" w="0">
-            <a:noFill/>
-            <a:prstDash val="solid"/>
-          </a:ln>
-        </p:spPr>
-      </p:sp>
-      <p:sp>
-        <p:nvSpPr>
-          <p:cNvPr id="41" name="strategy-3-metric-2-value">
-            <a:extLst xmlns:a="http://schemas.openxmlformats.org/drawingml/2006/main">
-              <a:ext uri="{FF2B5EF4-FFF2-40B4-BE49-F238E27FC236}">
-                <a16:creationId xmlns:a16="http://schemas.microsoft.com/office/drawing/2014/main" id="{1B9FC367-BC31-457F-A1EE-8D7DBBB809AF}"/>
-              </a:ext>
-            </a:extLst>
-          </p:cNvPr>
-          <p:cNvSpPr>
-            <a:spLocks xmlns:a="http://schemas.openxmlformats.org/drawingml/2006/main" noGrp="1"/>
-          </p:cNvSpPr>
-          <p:nvPr/>
-        </p:nvSpPr>
-        <p:spPr>
-          <a:xfrm xmlns:a="http://schemas.openxmlformats.org/drawingml/2006/main" rot="0">
-            <a:off x="9178823" y="5090522"/>
-            <a:ext cx="1250899" cy="277416"/>
+          <p:cNvPr id="39" name="strategy-3-metric-1-label">
+            <a:extLst xmlns:a="http://schemas.openxmlformats.org/drawingml/2006/main">
+              <a:ext uri="{FF2B5EF4-FFF2-40B4-BE49-F238E27FC236}">
+                <a16:creationId xmlns:a16="http://schemas.microsoft.com/office/drawing/2014/main" id="{9F60794C-D2B5-43ED-9FBD-4F23197FE453}"/>
+              </a:ext>
+            </a:extLst>
+          </p:cNvPr>
+          <p:cNvSpPr>
+            <a:spLocks xmlns:a="http://schemas.openxmlformats.org/drawingml/2006/main" noGrp="1"/>
+          </p:cNvSpPr>
+          <p:nvPr/>
+        </p:nvSpPr>
+        <p:spPr>
+          <a:xfrm xmlns:a="http://schemas.openxmlformats.org/drawingml/2006/main" rot="0">
+            <a:off x="7756474" y="5425088"/>
+            <a:ext cx="1250899" cy="228600"/>
           </a:xfrm>
           <a:prstGeom xmlns:a="http://schemas.openxmlformats.org/drawingml/2006/main" prst="rect">
             <a:avLst/>
@@ -3240,14 +3093,14 @@
           </a:bodyPr>
           <a:lstStyle xmlns:a="http://schemas.openxmlformats.org/drawingml/2006/main"/>
           <a:p xmlns:a="http://schemas.openxmlformats.org/drawingml/2006/main">
-            <a:pPr algn="ctr">
+            <a:pPr algn="l">
               <a:lnSpc>
-                <a:spcPct val="115000"/>
+                <a:spcPct val="120000"/>
               </a:lnSpc>
               <a:buNone/>
-              <a:defRPr sz="1900" b="1" i="0">
-                <a:solidFill>
-                  <a:srgbClr val="2F5EA8"/>
+              <a:defRPr sz="1500" b="0" i="0">
+                <a:solidFill>
+                  <a:srgbClr val="60758D"/>
                 </a:solidFill>
                 <a:latin typeface="Microsoft YaHei"/>
                 <a:ea typeface="Microsoft YaHei"/>
@@ -3255,37 +3108,68 @@
               </a:defRPr>
             </a:pPr>
             <a:r>
-              <a:rPr sz="1900" b="1" i="0">
-                <a:solidFill>
-                  <a:srgbClr val="2F5EA8"/>
+              <a:rPr sz="1500" b="0" i="0">
+                <a:solidFill>
+                  <a:srgbClr val="60758D"/>
                 </a:solidFill>
                 <a:latin typeface="Microsoft YaHei"/>
                 <a:ea typeface="Microsoft YaHei"/>
                 <a:cs typeface="Microsoft YaHei"/>
               </a:rPr>
-              <a:t>100%</a:t>
+              <a:t>单稿生成</a:t>
             </a:r>
           </a:p>
         </p:txBody>
       </p:sp>
       <p:sp>
         <p:nvSpPr>
-          <p:cNvPr id="42" name="strategy-3-metric-2-label">
-            <a:extLst xmlns:a="http://schemas.openxmlformats.org/drawingml/2006/main">
-              <a:ext uri="{FF2B5EF4-FFF2-40B4-BE49-F238E27FC236}">
-                <a16:creationId xmlns:a16="http://schemas.microsoft.com/office/drawing/2014/main" id="{FC2B227A-F486-44D9-8619-8AE430DCA641}"/>
-              </a:ext>
-            </a:extLst>
-          </p:cNvPr>
-          <p:cNvSpPr>
-            <a:spLocks xmlns:a="http://schemas.openxmlformats.org/drawingml/2006/main" noGrp="1"/>
-          </p:cNvSpPr>
-          <p:nvPr/>
-        </p:nvSpPr>
-        <p:spPr>
-          <a:xfrm xmlns:a="http://schemas.openxmlformats.org/drawingml/2006/main" rot="0">
-            <a:off x="9178823" y="5415563"/>
-            <a:ext cx="1250899" cy="228600"/>
+          <p:cNvPr id="40" name="strategy-3-metric-divider">
+            <a:extLst xmlns:a="http://schemas.openxmlformats.org/drawingml/2006/main">
+              <a:ext uri="{FF2B5EF4-FFF2-40B4-BE49-F238E27FC236}">
+                <a16:creationId xmlns:a16="http://schemas.microsoft.com/office/drawing/2014/main" id="{D94C2D58-92D6-4356-8182-94AE20295557}"/>
+              </a:ext>
+            </a:extLst>
+          </p:cNvPr>
+          <p:cNvSpPr>
+            <a:spLocks xmlns:a="http://schemas.openxmlformats.org/drawingml/2006/main" noGrp="1"/>
+          </p:cNvSpPr>
+          <p:nvPr/>
+        </p:nvSpPr>
+        <p:spPr>
+          <a:xfrm xmlns:a="http://schemas.openxmlformats.org/drawingml/2006/main" rot="0">
+            <a:off x="9131198" y="5124450"/>
+            <a:ext cx="9525" cy="514350"/>
+          </a:xfrm>
+          <a:prstGeom xmlns:a="http://schemas.openxmlformats.org/drawingml/2006/main" prst="rect">
+            <a:avLst/>
+          </a:prstGeom>
+          <a:solidFill xmlns:a="http://schemas.openxmlformats.org/drawingml/2006/main">
+            <a:srgbClr val="C6D8EB"/>
+          </a:solidFill>
+          <a:ln xmlns:a="http://schemas.openxmlformats.org/drawingml/2006/main" w="0">
+            <a:noFill/>
+            <a:prstDash val="solid"/>
+          </a:ln>
+        </p:spPr>
+      </p:sp>
+      <p:sp>
+        <p:nvSpPr>
+          <p:cNvPr id="41" name="strategy-3-metric-2-value">
+            <a:extLst xmlns:a="http://schemas.openxmlformats.org/drawingml/2006/main">
+              <a:ext uri="{FF2B5EF4-FFF2-40B4-BE49-F238E27FC236}">
+                <a16:creationId xmlns:a16="http://schemas.microsoft.com/office/drawing/2014/main" id="{800137A7-79E7-47CF-9A02-ACACC70F0930}"/>
+              </a:ext>
+            </a:extLst>
+          </p:cNvPr>
+          <p:cNvSpPr>
+            <a:spLocks xmlns:a="http://schemas.openxmlformats.org/drawingml/2006/main" noGrp="1"/>
+          </p:cNvSpPr>
+          <p:nvPr/>
+        </p:nvSpPr>
+        <p:spPr>
+          <a:xfrm xmlns:a="http://schemas.openxmlformats.org/drawingml/2006/main" rot="0">
+            <a:off x="9178823" y="5109572"/>
+            <a:ext cx="1250899" cy="277416"/>
           </a:xfrm>
           <a:prstGeom xmlns:a="http://schemas.openxmlformats.org/drawingml/2006/main" prst="rect">
             <a:avLst/>
@@ -3302,7 +3186,69 @@
           </a:bodyPr>
           <a:lstStyle xmlns:a="http://schemas.openxmlformats.org/drawingml/2006/main"/>
           <a:p xmlns:a="http://schemas.openxmlformats.org/drawingml/2006/main">
-            <a:pPr algn="ctr">
+            <a:pPr algn="l">
+              <a:lnSpc>
+                <a:spcPct val="115000"/>
+              </a:lnSpc>
+              <a:buNone/>
+              <a:defRPr sz="1900" b="1" i="0">
+                <a:solidFill>
+                  <a:srgbClr val="2F5EA8"/>
+                </a:solidFill>
+                <a:latin typeface="Microsoft YaHei"/>
+                <a:ea typeface="Microsoft YaHei"/>
+                <a:cs typeface="Microsoft YaHei"/>
+              </a:defRPr>
+            </a:pPr>
+            <a:r>
+              <a:rPr sz="1900" b="1" i="0">
+                <a:solidFill>
+                  <a:srgbClr val="2F5EA8"/>
+                </a:solidFill>
+                <a:latin typeface="Microsoft YaHei"/>
+                <a:ea typeface="Microsoft YaHei"/>
+                <a:cs typeface="Microsoft YaHei"/>
+              </a:rPr>
+              <a:t>100%</a:t>
+            </a:r>
+          </a:p>
+        </p:txBody>
+      </p:sp>
+      <p:sp>
+        <p:nvSpPr>
+          <p:cNvPr id="42" name="strategy-3-metric-2-label">
+            <a:extLst xmlns:a="http://schemas.openxmlformats.org/drawingml/2006/main">
+              <a:ext uri="{FF2B5EF4-FFF2-40B4-BE49-F238E27FC236}">
+                <a16:creationId xmlns:a16="http://schemas.microsoft.com/office/drawing/2014/main" id="{DFB4CA84-98CC-4927-9B84-F167242A6B08}"/>
+              </a:ext>
+            </a:extLst>
+          </p:cNvPr>
+          <p:cNvSpPr>
+            <a:spLocks xmlns:a="http://schemas.openxmlformats.org/drawingml/2006/main" noGrp="1"/>
+          </p:cNvSpPr>
+          <p:nvPr/>
+        </p:nvSpPr>
+        <p:spPr>
+          <a:xfrm xmlns:a="http://schemas.openxmlformats.org/drawingml/2006/main" rot="0">
+            <a:off x="9178823" y="5425088"/>
+            <a:ext cx="1250899" cy="228600"/>
+          </a:xfrm>
+          <a:prstGeom xmlns:a="http://schemas.openxmlformats.org/drawingml/2006/main" prst="rect">
+            <a:avLst/>
+          </a:prstGeom>
+          <a:noFill xmlns:a="http://schemas.openxmlformats.org/drawingml/2006/main"/>
+          <a:ln xmlns:a="http://schemas.openxmlformats.org/drawingml/2006/main" w="0">
+            <a:noFill/>
+            <a:prstDash val="solid"/>
+          </a:ln>
+        </p:spPr>
+        <p:txBody>
+          <a:bodyPr xmlns:a="http://schemas.openxmlformats.org/drawingml/2006/main" wrap="none" lIns="0" tIns="0" rIns="0" bIns="0" anchor="ctr">
+            <a:noAutofit/>
+          </a:bodyPr>
+          <a:lstStyle xmlns:a="http://schemas.openxmlformats.org/drawingml/2006/main"/>
+          <a:p xmlns:a="http://schemas.openxmlformats.org/drawingml/2006/main">
+            <a:pPr algn="l">
               <a:lnSpc>
                 <a:spcPct val="120000"/>
               </a:lnSpc>
@@ -3333,7 +3279,7 @@
     </p:spTree>
     <p:extLst>
       <p:ext uri="{BB962C8B-B14F-4D97-AF65-F5344CB8AC3E}">
-        <p14:creationId xmlns:p14="http://schemas.microsoft.com/office/powerpoint/2010/main" val="945003027"/>
+        <p14:creationId xmlns:p14="http://schemas.microsoft.com/office/powerpoint/2010/main" val="1208215411"/>
       </p:ext>
     </p:extLst>
   </p:cSld>
